--- a/curso/pptx/S11.pptx
+++ b/curso/pptx/S11.pptx
@@ -3892,8 +3892,8 @@
         </p:nvSpPr>
         <p:spPr>
           <a:xfrm>
-            <a:off x="640000" y="420000"/>
-            <a:ext cx="10912000" cy="420000"/>
+            <a:off x="10652000" y="380000"/>
+            <a:ext cx="900000" cy="800000"/>
           </a:xfrm>
           <a:prstGeom prst="rect">
             <a:avLst/>
@@ -3908,17 +3908,17 @@
           <a:p>
             <a:pPr>
               <a:spcAft>
-                <a:spcPts val="810"/>
-              </a:spcAft>
-            </a:pPr>
-            <a:r>
-              <a:rPr sz="1800" b="1">
+                <a:spcPts val="1980"/>
+              </a:spcAft>
+            </a:pPr>
+            <a:r>
+              <a:rPr sz="4400" b="0">
                 <a:solidFill>
                   <a:srgbClr val="1F2A44"/>
                 </a:solidFill>
                 <a:latin typeface="Nunito Sans"/>
               </a:rPr>
-              <a:t>🦉 Aula de Filosofía</a:t>
+              <a:t>🙃</a:t>
             </a:r>
           </a:p>
         </p:txBody>

--- a/curso/pptx/S11.pptx
+++ b/curso/pptx/S11.pptx
@@ -473,426 +473,6 @@
     </a:lvl9pPr>
   </p:notesStyle>
 </p:notesMaster>
-</file>
-
-<file path=ppt/notesSlides/notesSlide1.xml><?xml version="1.0" encoding="utf-8"?>
-<p:notes xmlns:a="http://schemas.openxmlformats.org/drawingml/2006/main" xmlns:p="http://schemas.openxmlformats.org/presentationml/2006/main" xmlns:r="http://schemas.openxmlformats.org/officeDocument/2006/relationships">
-  <p:cSld>
-    <p:spTree>
-      <p:nvGrpSpPr>
-        <p:cNvPr id="1" name=""/>
-        <p:cNvGrpSpPr/>
-        <p:nvPr/>
-      </p:nvGrpSpPr>
-      <p:grpSpPr>
-        <a:xfrm>
-          <a:off x="0" y="0"/>
-          <a:ext cx="0" cy="0"/>
-          <a:chOff x="0" y="0"/>
-          <a:chExt cx="0" cy="0"/>
-        </a:xfrm>
-      </p:grpSpPr>
-      <p:sp>
-        <p:nvSpPr>
-          <p:cNvPr id="2" name="Slide Image Placeholder 1"/>
-          <p:cNvSpPr>
-            <a:spLocks noGrp="1"/>
-          </p:cNvSpPr>
-          <p:nvPr>
-            <p:ph type="sldImg" idx="2"/>
-          </p:nvPr>
-        </p:nvSpPr>
-        <p:spPr/>
-      </p:sp>
-      <p:sp>
-        <p:nvSpPr>
-          <p:cNvPr id="3" name="Notes Placeholder 2"/>
-          <p:cNvSpPr>
-            <a:spLocks noGrp="1"/>
-          </p:cNvSpPr>
-          <p:nvPr>
-            <p:ph type="body" idx="3" sz="quarter"/>
-          </p:nvPr>
-        </p:nvSpPr>
-        <p:spPr/>
-        <p:txBody>
-          <a:bodyPr/>
-          <a:lstStyle/>
-          <a:p>
-            <a:r>
-              <a:t>3 minutos. Sin apuntes. Es para recordar, no cuenta para nota.</a:t>
-            </a:r>
-          </a:p>
-        </p:txBody>
-      </p:sp>
-      <p:sp>
-        <p:nvSpPr>
-          <p:cNvPr id="4" name="Slide Number Placeholder 3"/>
-          <p:cNvSpPr>
-            <a:spLocks noGrp="1"/>
-          </p:cNvSpPr>
-          <p:nvPr>
-            <p:ph type="sldNum" idx="5" sz="quarter"/>
-          </p:nvPr>
-        </p:nvSpPr>
-        <p:spPr/>
-      </p:sp>
-    </p:spTree>
-  </p:cSld>
-  <p:clrMapOvr>
-    <a:masterClrMapping/>
-  </p:clrMapOvr>
-</p:notes>
-</file>
-
-<file path=ppt/notesSlides/notesSlide2.xml><?xml version="1.0" encoding="utf-8"?>
-<p:notes xmlns:a="http://schemas.openxmlformats.org/drawingml/2006/main" xmlns:p="http://schemas.openxmlformats.org/presentationml/2006/main" xmlns:r="http://schemas.openxmlformats.org/officeDocument/2006/relationships">
-  <p:cSld>
-    <p:spTree>
-      <p:nvGrpSpPr>
-        <p:cNvPr id="1" name=""/>
-        <p:cNvGrpSpPr/>
-        <p:nvPr/>
-      </p:nvGrpSpPr>
-      <p:grpSpPr>
-        <a:xfrm>
-          <a:off x="0" y="0"/>
-          <a:ext cx="0" cy="0"/>
-          <a:chOff x="0" y="0"/>
-          <a:chExt cx="0" cy="0"/>
-        </a:xfrm>
-      </p:grpSpPr>
-      <p:sp>
-        <p:nvSpPr>
-          <p:cNvPr id="2" name="Slide Image Placeholder 1"/>
-          <p:cNvSpPr>
-            <a:spLocks noGrp="1"/>
-          </p:cNvSpPr>
-          <p:nvPr>
-            <p:ph type="sldImg" idx="2"/>
-          </p:nvPr>
-        </p:nvSpPr>
-        <p:spPr/>
-      </p:sp>
-      <p:sp>
-        <p:nvSpPr>
-          <p:cNvPr id="3" name="Notes Placeholder 2"/>
-          <p:cNvSpPr>
-            <a:spLocks noGrp="1"/>
-          </p:cNvSpPr>
-          <p:nvPr>
-            <p:ph type="body" idx="3" sz="quarter"/>
-          </p:nvPr>
-        </p:nvSpPr>
-        <p:spPr/>
-        <p:txBody>
-          <a:bodyPr/>
-          <a:lstStyle/>
-          <a:p>
-            <a:r>
-              <a:t>3 minutos. Sin apuntes. Es para recordar, no cuenta para nota.</a:t>
-            </a:r>
-          </a:p>
-        </p:txBody>
-      </p:sp>
-      <p:sp>
-        <p:nvSpPr>
-          <p:cNvPr id="4" name="Slide Number Placeholder 3"/>
-          <p:cNvSpPr>
-            <a:spLocks noGrp="1"/>
-          </p:cNvSpPr>
-          <p:nvPr>
-            <p:ph type="sldNum" idx="5" sz="quarter"/>
-          </p:nvPr>
-        </p:nvSpPr>
-        <p:spPr/>
-      </p:sp>
-    </p:spTree>
-  </p:cSld>
-  <p:clrMapOvr>
-    <a:masterClrMapping/>
-  </p:clrMapOvr>
-</p:notes>
-</file>
-
-<file path=ppt/notesSlides/notesSlide3.xml><?xml version="1.0" encoding="utf-8"?>
-<p:notes xmlns:a="http://schemas.openxmlformats.org/drawingml/2006/main" xmlns:p="http://schemas.openxmlformats.org/presentationml/2006/main" xmlns:r="http://schemas.openxmlformats.org/officeDocument/2006/relationships">
-  <p:cSld>
-    <p:spTree>
-      <p:nvGrpSpPr>
-        <p:cNvPr id="1" name=""/>
-        <p:cNvGrpSpPr/>
-        <p:nvPr/>
-      </p:nvGrpSpPr>
-      <p:grpSpPr>
-        <a:xfrm>
-          <a:off x="0" y="0"/>
-          <a:ext cx="0" cy="0"/>
-          <a:chOff x="0" y="0"/>
-          <a:chExt cx="0" cy="0"/>
-        </a:xfrm>
-      </p:grpSpPr>
-      <p:sp>
-        <p:nvSpPr>
-          <p:cNvPr id="2" name="Slide Image Placeholder 1"/>
-          <p:cNvSpPr>
-            <a:spLocks noGrp="1"/>
-          </p:cNvSpPr>
-          <p:nvPr>
-            <p:ph type="sldImg" idx="2"/>
-          </p:nvPr>
-        </p:nvSpPr>
-        <p:spPr/>
-      </p:sp>
-      <p:sp>
-        <p:nvSpPr>
-          <p:cNvPr id="3" name="Notes Placeholder 2"/>
-          <p:cNvSpPr>
-            <a:spLocks noGrp="1"/>
-          </p:cNvSpPr>
-          <p:nvPr>
-            <p:ph type="body" idx="3" sz="quarter"/>
-          </p:nvPr>
-        </p:nvSpPr>
-        <p:spPr/>
-        <p:txBody>
-          <a:bodyPr/>
-          <a:lstStyle/>
-          <a:p>
-            <a:r>
-              <a:t>Nadie tiene que contestar: solo pensarlo.</a:t>
-            </a:r>
-          </a:p>
-        </p:txBody>
-      </p:sp>
-      <p:sp>
-        <p:nvSpPr>
-          <p:cNvPr id="4" name="Slide Number Placeholder 3"/>
-          <p:cNvSpPr>
-            <a:spLocks noGrp="1"/>
-          </p:cNvSpPr>
-          <p:nvPr>
-            <p:ph type="sldNum" idx="5" sz="quarter"/>
-          </p:nvPr>
-        </p:nvSpPr>
-        <p:spPr/>
-      </p:sp>
-    </p:spTree>
-  </p:cSld>
-  <p:clrMapOvr>
-    <a:masterClrMapping/>
-  </p:clrMapOvr>
-</p:notes>
-</file>
-
-<file path=ppt/notesSlides/notesSlide4.xml><?xml version="1.0" encoding="utf-8"?>
-<p:notes xmlns:a="http://schemas.openxmlformats.org/drawingml/2006/main" xmlns:p="http://schemas.openxmlformats.org/presentationml/2006/main" xmlns:r="http://schemas.openxmlformats.org/officeDocument/2006/relationships">
-  <p:cSld>
-    <p:spTree>
-      <p:nvGrpSpPr>
-        <p:cNvPr id="1" name=""/>
-        <p:cNvGrpSpPr/>
-        <p:nvPr/>
-      </p:nvGrpSpPr>
-      <p:grpSpPr>
-        <a:xfrm>
-          <a:off x="0" y="0"/>
-          <a:ext cx="0" cy="0"/>
-          <a:chOff x="0" y="0"/>
-          <a:chExt cx="0" cy="0"/>
-        </a:xfrm>
-      </p:grpSpPr>
-      <p:sp>
-        <p:nvSpPr>
-          <p:cNvPr id="2" name="Slide Image Placeholder 1"/>
-          <p:cNvSpPr>
-            <a:spLocks noGrp="1"/>
-          </p:cNvSpPr>
-          <p:nvPr>
-            <p:ph type="sldImg" idx="2"/>
-          </p:nvPr>
-        </p:nvSpPr>
-        <p:spPr/>
-      </p:sp>
-      <p:sp>
-        <p:nvSpPr>
-          <p:cNvPr id="3" name="Notes Placeholder 2"/>
-          <p:cNvSpPr>
-            <a:spLocks noGrp="1"/>
-          </p:cNvSpPr>
-          <p:nvPr>
-            <p:ph type="body" idx="3" sz="quarter"/>
-          </p:nvPr>
-        </p:nvSpPr>
-        <p:spPr/>
-        <p:txBody>
-          <a:bodyPr/>
-          <a:lstStyle/>
-          <a:p>
-            <a:r>
-              <a:t>Dejar unos segundos para que piensen la respuesta fácil antes de enseñar los pasos.</a:t>
-            </a:r>
-          </a:p>
-        </p:txBody>
-      </p:sp>
-      <p:sp>
-        <p:nvSpPr>
-          <p:cNvPr id="4" name="Slide Number Placeholder 3"/>
-          <p:cNvSpPr>
-            <a:spLocks noGrp="1"/>
-          </p:cNvSpPr>
-          <p:nvPr>
-            <p:ph type="sldNum" idx="5" sz="quarter"/>
-          </p:nvPr>
-        </p:nvSpPr>
-        <p:spPr/>
-      </p:sp>
-    </p:spTree>
-  </p:cSld>
-  <p:clrMapOvr>
-    <a:masterClrMapping/>
-  </p:clrMapOvr>
-</p:notes>
-</file>
-
-<file path=ppt/notesSlides/notesSlide5.xml><?xml version="1.0" encoding="utf-8"?>
-<p:notes xmlns:a="http://schemas.openxmlformats.org/drawingml/2006/main" xmlns:p="http://schemas.openxmlformats.org/presentationml/2006/main" xmlns:r="http://schemas.openxmlformats.org/officeDocument/2006/relationships">
-  <p:cSld>
-    <p:spTree>
-      <p:nvGrpSpPr>
-        <p:cNvPr id="1" name=""/>
-        <p:cNvGrpSpPr/>
-        <p:nvPr/>
-      </p:nvGrpSpPr>
-      <p:grpSpPr>
-        <a:xfrm>
-          <a:off x="0" y="0"/>
-          <a:ext cx="0" cy="0"/>
-          <a:chOff x="0" y="0"/>
-          <a:chExt cx="0" cy="0"/>
-        </a:xfrm>
-      </p:grpSpPr>
-      <p:sp>
-        <p:nvSpPr>
-          <p:cNvPr id="2" name="Slide Image Placeholder 1"/>
-          <p:cNvSpPr>
-            <a:spLocks noGrp="1"/>
-          </p:cNvSpPr>
-          <p:nvPr>
-            <p:ph type="sldImg" idx="2"/>
-          </p:nvPr>
-        </p:nvSpPr>
-        <p:spPr/>
-      </p:sp>
-      <p:sp>
-        <p:nvSpPr>
-          <p:cNvPr id="3" name="Notes Placeholder 2"/>
-          <p:cNvSpPr>
-            <a:spLocks noGrp="1"/>
-          </p:cNvSpPr>
-          <p:nvPr>
-            <p:ph type="body" idx="3" sz="quarter"/>
-          </p:nvPr>
-        </p:nvSpPr>
-        <p:spPr/>
-        <p:txBody>
-          <a:bodyPr/>
-          <a:lstStyle/>
-          <a:p>
-            <a:r>
-              <a:t>Dejar 2 minutos para que lo escriban. La diapositiva siguiente muestra el resumen.</a:t>
-            </a:r>
-          </a:p>
-        </p:txBody>
-      </p:sp>
-      <p:sp>
-        <p:nvSpPr>
-          <p:cNvPr id="4" name="Slide Number Placeholder 3"/>
-          <p:cNvSpPr>
-            <a:spLocks noGrp="1"/>
-          </p:cNvSpPr>
-          <p:nvPr>
-            <p:ph type="sldNum" idx="5" sz="quarter"/>
-          </p:nvPr>
-        </p:nvSpPr>
-        <p:spPr/>
-      </p:sp>
-    </p:spTree>
-  </p:cSld>
-  <p:clrMapOvr>
-    <a:masterClrMapping/>
-  </p:clrMapOvr>
-</p:notes>
-</file>
-
-<file path=ppt/notesSlides/notesSlide6.xml><?xml version="1.0" encoding="utf-8"?>
-<p:notes xmlns:a="http://schemas.openxmlformats.org/drawingml/2006/main" xmlns:p="http://schemas.openxmlformats.org/presentationml/2006/main" xmlns:r="http://schemas.openxmlformats.org/officeDocument/2006/relationships">
-  <p:cSld>
-    <p:spTree>
-      <p:nvGrpSpPr>
-        <p:cNvPr id="1" name=""/>
-        <p:cNvGrpSpPr/>
-        <p:nvPr/>
-      </p:nvGrpSpPr>
-      <p:grpSpPr>
-        <a:xfrm>
-          <a:off x="0" y="0"/>
-          <a:ext cx="0" cy="0"/>
-          <a:chOff x="0" y="0"/>
-          <a:chExt cx="0" cy="0"/>
-        </a:xfrm>
-      </p:grpSpPr>
-      <p:sp>
-        <p:nvSpPr>
-          <p:cNvPr id="2" name="Slide Image Placeholder 1"/>
-          <p:cNvSpPr>
-            <a:spLocks noGrp="1"/>
-          </p:cNvSpPr>
-          <p:nvPr>
-            <p:ph type="sldImg" idx="2"/>
-          </p:nvPr>
-        </p:nvSpPr>
-        <p:spPr/>
-      </p:sp>
-      <p:sp>
-        <p:nvSpPr>
-          <p:cNvPr id="3" name="Notes Placeholder 2"/>
-          <p:cNvSpPr>
-            <a:spLocks noGrp="1"/>
-          </p:cNvSpPr>
-          <p:nvPr>
-            <p:ph type="body" idx="3" sz="quarter"/>
-          </p:nvPr>
-        </p:nvSpPr>
-        <p:spPr/>
-        <p:txBody>
-          <a:bodyPr/>
-          <a:lstStyle/>
-          <a:p>
-            <a:r>
-              <a:t>Buscar: «contraejemplo qué es» · «argumento por analogía ejemplos»</a:t>
-            </a:r>
-          </a:p>
-        </p:txBody>
-      </p:sp>
-      <p:sp>
-        <p:nvSpPr>
-          <p:cNvPr id="4" name="Slide Number Placeholder 3"/>
-          <p:cNvSpPr>
-            <a:spLocks noGrp="1"/>
-          </p:cNvSpPr>
-          <p:nvPr>
-            <p:ph type="sldNum" idx="5" sz="quarter"/>
-          </p:nvPr>
-        </p:nvSpPr>
-        <p:spPr/>
-      </p:sp>
-    </p:spTree>
-  </p:cSld>
-  <p:clrMapOvr>
-    <a:masterClrMapping/>
-  </p:clrMapOvr>
-</p:notes>
 </file>
 
 <file path=ppt/slideLayouts/slideLayout1.xml><?xml version="1.0" encoding="utf-8"?>

--- a/curso/pptx/S11.pptx
+++ b/curso/pptx/S11.pptx
@@ -3801,7 +3801,7 @@
                 </a:solidFill>
                 <a:latin typeface="Nunito Sans"/>
               </a:rPr>
-              <a:t>Aitor: «Nadie de mi clase lee libros por gusto». Maialen: «Yo he leído tres este verano, y nadie me obligó».</a:t>
+              <a:t>Un chico: «Nadie de mi clase lee libros por gusto». Una chica: «Yo he leído tres este verano, y nadie me obligó».</a:t>
             </a:r>
           </a:p>
         </p:txBody>
@@ -3849,7 +3849,7 @@
                 </a:solidFill>
                 <a:latin typeface="Nunito Sans"/>
               </a:rPr>
-              <a:t>La frase de Aitor es general: «nadie».</a:t>
+              <a:t>La frase del chico es general: «nadie».</a:t>
             </a:r>
           </a:p>
           <a:p>
@@ -3874,7 +3874,7 @@
                 </a:solidFill>
                 <a:latin typeface="Nunito Sans"/>
               </a:rPr>
-              <a:t>Maialen es un caso en contra: un </a:t>
+              <a:t>La chica es un caso en contra: un </a:t>
             </a:r>
             <a:r>
               <a:rPr sz="2400" b="1">
@@ -3942,7 +3942,7 @@
                 </a:solidFill>
                 <a:latin typeface="Nunito Sans"/>
               </a:rPr>
-              <a:t>Conclusión: la frase de Aitor es falsa. Podría decir «pocos», pero no «nadie».</a:t>
+              <a:t>Conclusión: la frase del chico es falsa. Podría decir «pocos», pero no «nadie».</a:t>
             </a:r>
           </a:p>
         </p:txBody>
@@ -4128,7 +4128,7 @@
                 </a:solidFill>
                 <a:latin typeface="Nunito Sans"/>
               </a:rPr>
-              <a:t>Kevin: «Todos los youtubers son ricos: mira estos cinco, que tienen casas enormes».</a:t>
+              <a:t>Un chico: «Todos los youtubers son ricos: mira estos cinco, que tienen casas enormes».</a:t>
             </a:r>
           </a:p>
         </p:txBody>
@@ -4176,7 +4176,7 @@
                 </a:solidFill>
                 <a:latin typeface="Nunito Sans"/>
               </a:rPr>
-              <a:t>Kevin da cinco </a:t>
+              <a:t>Ese chico da cinco </a:t>
             </a:r>
             <a:r>
               <a:rPr sz="2400" b="1">
@@ -5188,7 +5188,7 @@
                 </a:solidFill>
                 <a:latin typeface="Nunito Sans"/>
               </a:rPr>
-              <a:t>Leire: «A los perros les encanta salir a pasear». Kevin: «El mío odia pasear: se esconde debajo de la cama».</a:t>
+              <a:t>Una chica: «A los perros les encanta salir a pasear». Un chico: «El mío odia pasear: se esconde debajo de la cama».</a:t>
             </a:r>
           </a:p>
         </p:txBody>
@@ -5236,7 +5236,7 @@
                 </a:solidFill>
                 <a:latin typeface="Nunito Sans"/>
               </a:rPr>
-              <a:t>Kevin tiene un contraejemplo. ¿La frase de Leire es falsa?</a:t>
+              <a:t>El chico tiene un contraejemplo. ¿La frase de la chica es falsa?</a:t>
             </a:r>
           </a:p>
           <a:p>
@@ -5261,7 +5261,7 @@
                 </a:solidFill>
                 <a:latin typeface="Nunito Sans"/>
               </a:rPr>
-              <a:t>Leire no dice «todos los perros»: dice cómo </a:t>
+              <a:t>La chica no dice «todos los perros»: dice cómo </a:t>
             </a:r>
             <a:r>
               <a:rPr sz="2400" b="1">
@@ -6914,7 +6914,7 @@
                 </a:solidFill>
                 <a:latin typeface="Nunito Sans"/>
               </a:rPr>
-              <a:t>Omar dice: «Todos los gatos odian el agua». Leire le enseña un vídeo de su gato nadando tan tranquilo.</a:t>
+              <a:t>Un chico dice: «Todos los gatos odian el agua». Una chica le enseña un vídeo de su gato nadando tan tranquilo.</a:t>
             </a:r>
           </a:p>
         </p:txBody>
@@ -6953,7 +6953,7 @@
                 </a:solidFill>
                 <a:latin typeface="Nunito Sans"/>
               </a:rPr>
-              <a:t>¿Qué le pasa a la frase de Omar?</a:t>
+              <a:t>¿Qué le pasa a la frase de ese chico?</a:t>
             </a:r>
           </a:p>
         </p:txBody>

--- a/curso/pptx/S11.pptx
+++ b/curso/pptx/S11.pptx
@@ -21,9 +21,6 @@
     <p:sldId id="269" r:id="rId21"/>
     <p:sldId id="270" r:id="rId22"/>
     <p:sldId id="271" r:id="rId23"/>
-    <p:sldId id="272" r:id="rId24"/>
-    <p:sldId id="273" r:id="rId25"/>
-    <p:sldId id="274" r:id="rId26"/>
   </p:sldIdLst>
   <p:sldSz cx="12192000" cy="6858000" type="screen4x3"/>
   <p:notesSz cx="6858000" cy="9144000"/>
@@ -3537,7 +3534,7 @@
                 </a:solidFill>
                 <a:latin typeface="Nunito Sans"/>
               </a:rPr>
-              <a:t>PENSAMIENTO CRÍTICO · SESIÓN 11 · UNIDAD 2 · ARGUMENTAR</a:t>
+              <a:t>PENSAMIENTO CRÍTICO · SESIÓN 11 · UNIDAD 2 · AUTORIDAD E INFLUENCIA</a:t>
             </a:r>
           </a:p>
         </p:txBody>
@@ -3576,7 +3573,7 @@
                 </a:solidFill>
                 <a:latin typeface="Fredoka"/>
               </a:rPr>
-              <a:t>Ejemplos, contraejemplos y analogías</a:t>
+              <a:t>Repaso y examen de la unidad 2</a:t>
             </a:r>
           </a:p>
         </p:txBody>
@@ -3615,7 +3612,7 @@
                 </a:solidFill>
                 <a:latin typeface="Nunito Sans"/>
               </a:rPr>
-              <a:t>Los ejemplos apoyan una idea, un solo contraejemplo basta para tumbar un «todos» y una analogía compara dos cosas parecidas.</a:t>
+              <a:t>Repasamos la autoridad por poder y por saber, cuándo fiarse de un experto, las falacias de autoridad y ad populum, y Asch y Milgram.</a:t>
             </a:r>
           </a:p>
         </p:txBody>
@@ -3680,7 +3677,7 @@
                 </a:solidFill>
                 <a:latin typeface="Nunito Sans"/>
               </a:rPr>
-              <a:t>BLOQUE 2 · CASOS RESUELTOS</a:t>
+              <a:t>BLOQUE 1 · REPASO DE LA UNIDAD</a:t>
             </a:r>
           </a:p>
         </p:txBody>
@@ -3719,7 +3716,7 @@
                 </a:solidFill>
                 <a:latin typeface="Fredoka"/>
               </a:rPr>
-              <a:t>Caso 1 · Un contraejemplo</a:t>
+              <a:t>La idea de la unidad</a:t>
             </a:r>
           </a:p>
         </p:txBody>
@@ -3732,14 +3729,14 @@
         </p:nvSpPr>
         <p:spPr>
           <a:xfrm>
-            <a:off x="640000" y="1600000"/>
-            <a:ext cx="10912000" cy="1100000"/>
+            <a:off x="640000" y="1650000"/>
+            <a:ext cx="10912000" cy="1150000"/>
           </a:xfrm>
           <a:prstGeom prst="rect">
             <a:avLst/>
           </a:prstGeom>
           <a:solidFill>
-            <a:srgbClr val="FFFFFF"/>
+            <a:srgbClr val="EAF0F7"/>
           </a:solidFill>
           <a:ln>
             <a:noFill/>
@@ -3775,7 +3772,7 @@
         </p:nvSpPr>
         <p:spPr>
           <a:xfrm>
-            <a:off x="840000" y="1650000"/>
+            <a:off x="840000" y="1730000"/>
             <a:ext cx="10512000" cy="1000000"/>
           </a:xfrm>
           <a:prstGeom prst="rect">
@@ -3791,17 +3788,17 @@
           <a:p>
             <a:pPr>
               <a:spcAft>
-                <a:spcPts val="1170"/>
+                <a:spcPts val="1260"/>
               </a:spcAft>
             </a:pPr>
             <a:r>
-              <a:rPr sz="2600" b="1">
+              <a:rPr sz="2800" b="1">
                 <a:solidFill>
                   <a:srgbClr val="1F2A44"/>
                 </a:solidFill>
                 <a:latin typeface="Nunito Sans"/>
               </a:rPr>
-              <a:t>Un chico: «Nadie de mi clase lee libros por gusto». Una chica: «Yo he leído tres este verano, y nadie me obligó».</a:t>
+              <a:t>Hacer caso a otros no es malo. Lo malo es hacerlo sin mirar las razones.</a:t>
             </a:r>
           </a:p>
         </p:txBody>
@@ -3814,8 +3811,8 @@
         </p:nvSpPr>
         <p:spPr>
           <a:xfrm>
-            <a:off x="640000" y="2900000"/>
-            <a:ext cx="10912000" cy="3500000"/>
+            <a:off x="640000" y="3000000"/>
+            <a:ext cx="10912000" cy="3458000"/>
           </a:xfrm>
           <a:prstGeom prst="rect">
             <a:avLst/>
@@ -3830,119 +3827,76 @@
           <a:p>
             <a:pPr>
               <a:spcAft>
-                <a:spcPts val="1080"/>
+                <a:spcPts val="1260"/>
               </a:spcAft>
             </a:pPr>
             <a:r>
-              <a:rPr sz="2400" b="1">
+              <a:rPr sz="2800" b="1">
                 <a:solidFill>
                   <a:srgbClr val="E8793A"/>
                 </a:solidFill>
                 <a:latin typeface="Nunito Sans"/>
               </a:rPr>
-              <a:t>1. </a:t>
-            </a:r>
-            <a:r>
-              <a:rPr sz="2400" b="0">
+              <a:t>• </a:t>
+            </a:r>
+            <a:r>
+              <a:rPr sz="2800" b="0">
                 <a:solidFill>
                   <a:srgbClr val="1F2A44"/>
                 </a:solidFill>
                 <a:latin typeface="Nunito Sans"/>
               </a:rPr>
-              <a:t>La frase del chico es general: «nadie».</a:t>
+              <a:t>¿Sabe del tema y tiene pruebas?</a:t>
             </a:r>
           </a:p>
           <a:p>
             <a:pPr>
               <a:spcAft>
-                <a:spcPts val="1080"/>
+                <a:spcPts val="1260"/>
               </a:spcAft>
             </a:pPr>
             <a:r>
-              <a:rPr sz="2400" b="1">
+              <a:rPr sz="2800" b="1">
                 <a:solidFill>
                   <a:srgbClr val="E8793A"/>
                 </a:solidFill>
                 <a:latin typeface="Nunito Sans"/>
               </a:rPr>
-              <a:t>2. </a:t>
-            </a:r>
-            <a:r>
-              <a:rPr sz="2400" b="0">
+              <a:t>• </a:t>
+            </a:r>
+            <a:r>
+              <a:rPr sz="2800" b="0">
                 <a:solidFill>
                   <a:srgbClr val="1F2A44"/>
                 </a:solidFill>
                 <a:latin typeface="Nunito Sans"/>
               </a:rPr>
-              <a:t>La chica es un caso en contra: un </a:t>
-            </a:r>
-            <a:r>
-              <a:rPr sz="2400" b="1">
-                <a:solidFill>
-                  <a:srgbClr val="1F2A44"/>
-                </a:solidFill>
-                <a:latin typeface="Nunito Sans"/>
-              </a:rPr>
-              <a:t>contraejemplo</a:t>
-            </a:r>
-            <a:r>
-              <a:rPr sz="2400" b="0">
-                <a:solidFill>
-                  <a:srgbClr val="1F2A44"/>
-                </a:solidFill>
-                <a:latin typeface="Nunito Sans"/>
-              </a:rPr>
-              <a:t>.</a:t>
+              <a:t>¿Cuántos lo dicen, y por qué lo dicen?</a:t>
             </a:r>
           </a:p>
           <a:p>
             <a:pPr>
               <a:spcAft>
-                <a:spcPts val="1080"/>
+                <a:spcPts val="1260"/>
               </a:spcAft>
             </a:pPr>
             <a:r>
-              <a:rPr sz="2400" b="1">
+              <a:rPr sz="2800" b="1">
                 <a:solidFill>
                   <a:srgbClr val="E8793A"/>
                 </a:solidFill>
                 <a:latin typeface="Nunito Sans"/>
               </a:rPr>
-              <a:t>3. </a:t>
-            </a:r>
-            <a:r>
-              <a:rPr sz="2400" b="0">
+              <a:t>• </a:t>
+            </a:r>
+            <a:r>
+              <a:rPr sz="2800" b="0">
                 <a:solidFill>
                   <a:srgbClr val="1F2A44"/>
                 </a:solidFill>
                 <a:latin typeface="Nunito Sans"/>
               </a:rPr>
-              <a:t>No hace falta más: basta uno.</a:t>
-            </a:r>
-          </a:p>
-          <a:p>
-            <a:pPr>
-              <a:spcAft>
-                <a:spcPts val="1080"/>
-              </a:spcAft>
-            </a:pPr>
-            <a:r>
-              <a:rPr sz="2400" b="1">
-                <a:solidFill>
-                  <a:srgbClr val="E8793A"/>
-                </a:solidFill>
-                <a:latin typeface="Nunito Sans"/>
-              </a:rPr>
-              <a:t>4. </a:t>
-            </a:r>
-            <a:r>
-              <a:rPr sz="2400" b="0">
-                <a:solidFill>
-                  <a:srgbClr val="1F2A44"/>
-                </a:solidFill>
-                <a:latin typeface="Nunito Sans"/>
-              </a:rPr>
-              <a:t>Conclusión: la frase del chico es falsa. Podría decir «pocos», pero no «nadie».</a:t>
+              <a:t>¿Obedezco porque tiene razón o por miedo?</a:t>
             </a:r>
           </a:p>
         </p:txBody>
@@ -3961,7 +3915,7 @@
     <p:bg>
       <p:bgPr>
         <a:solidFill>
-          <a:srgbClr val="FBF7EF"/>
+          <a:srgbClr val="1F2A44"/>
         </a:solidFill>
         <a:effectLst/>
       </p:bgPr>
@@ -3981,8 +3935,8 @@
         </p:nvSpPr>
         <p:spPr>
           <a:xfrm>
-            <a:off x="640000" y="380000"/>
-            <a:ext cx="10912000" cy="420000"/>
+            <a:off x="640000" y="2300000"/>
+            <a:ext cx="10912000" cy="500000"/>
           </a:xfrm>
           <a:prstGeom prst="rect">
             <a:avLst/>
@@ -3997,17 +3951,17 @@
           <a:p>
             <a:pPr>
               <a:spcAft>
-                <a:spcPts val="630"/>
+                <a:spcPts val="810"/>
               </a:spcAft>
             </a:pPr>
             <a:r>
-              <a:rPr sz="1400" b="1">
-                <a:solidFill>
-                  <a:srgbClr val="E8793A"/>
+              <a:rPr sz="1800" b="1">
+                <a:solidFill>
+                  <a:srgbClr val="F4B183"/>
                 </a:solidFill>
                 <a:latin typeface="Nunito Sans"/>
               </a:rPr>
-              <a:t>BLOQUE 2 · CASOS RESUELTOS</a:t>
+              <a:t>BLOQUE 2</a:t>
             </a:r>
           </a:p>
         </p:txBody>
@@ -4020,7 +3974,7 @@
         </p:nvSpPr>
         <p:spPr>
           <a:xfrm>
-            <a:off x="640000" y="760000"/>
+            <a:off x="640000" y="2800000"/>
             <a:ext cx="10912000" cy="800000"/>
           </a:xfrm>
           <a:prstGeom prst="rect">
@@ -4036,240 +3990,17 @@
           <a:p>
             <a:pPr>
               <a:spcAft>
-                <a:spcPts val="1710"/>
+                <a:spcPts val="2160"/>
               </a:spcAft>
             </a:pPr>
             <a:r>
-              <a:rPr sz="3800" b="1">
-                <a:solidFill>
-                  <a:srgbClr val="1F2A44"/>
+              <a:rPr sz="4800" b="1">
+                <a:solidFill>
+                  <a:srgbClr val="FBF7EF"/>
                 </a:solidFill>
                 <a:latin typeface="Fredoka"/>
               </a:rPr>
-              <a:t>Caso 2 · Muchos ejemplos no bastan</a:t>
-            </a:r>
-          </a:p>
-        </p:txBody>
-      </p:sp>
-      <p:sp>
-        <p:nvSpPr>
-          <p:cNvPr id="4" name="Rectangle 3"/>
-          <p:cNvSpPr/>
-          <p:nvPr/>
-        </p:nvSpPr>
-        <p:spPr>
-          <a:xfrm>
-            <a:off x="640000" y="1600000"/>
-            <a:ext cx="10912000" cy="1100000"/>
-          </a:xfrm>
-          <a:prstGeom prst="rect">
-            <a:avLst/>
-          </a:prstGeom>
-          <a:solidFill>
-            <a:srgbClr val="FFFFFF"/>
-          </a:solidFill>
-          <a:ln>
-            <a:noFill/>
-          </a:ln>
-        </p:spPr>
-        <p:style>
-          <a:lnRef idx="1">
-            <a:schemeClr val="accent1"/>
-          </a:lnRef>
-          <a:fillRef idx="3">
-            <a:schemeClr val="accent1"/>
-          </a:fillRef>
-          <a:effectRef idx="2">
-            <a:schemeClr val="accent1"/>
-          </a:effectRef>
-          <a:fontRef idx="minor">
-            <a:schemeClr val="lt1"/>
-          </a:fontRef>
-        </p:style>
-        <p:txBody>
-          <a:bodyPr rtlCol="0" anchor="ctr"/>
-          <a:lstStyle/>
-          <a:p>
-            <a:pPr algn="ctr"/>
-          </a:p>
-        </p:txBody>
-      </p:sp>
-      <p:sp>
-        <p:nvSpPr>
-          <p:cNvPr id="5" name="TextBox 4"/>
-          <p:cNvSpPr txBox="1"/>
-          <p:nvPr/>
-        </p:nvSpPr>
-        <p:spPr>
-          <a:xfrm>
-            <a:off x="840000" y="1650000"/>
-            <a:ext cx="10512000" cy="1000000"/>
-          </a:xfrm>
-          <a:prstGeom prst="rect">
-            <a:avLst/>
-          </a:prstGeom>
-          <a:noFill/>
-        </p:spPr>
-        <p:txBody>
-          <a:bodyPr wrap="square" anchor="ctr">
-            <a:spAutoFit/>
-          </a:bodyPr>
-          <a:lstStyle/>
-          <a:p>
-            <a:pPr>
-              <a:spcAft>
-                <a:spcPts val="1170"/>
-              </a:spcAft>
-            </a:pPr>
-            <a:r>
-              <a:rPr sz="2600" b="1">
-                <a:solidFill>
-                  <a:srgbClr val="1F2A44"/>
-                </a:solidFill>
-                <a:latin typeface="Nunito Sans"/>
-              </a:rPr>
-              <a:t>Un chico: «Todos los youtubers son ricos: mira estos cinco, que tienen casas enormes».</a:t>
-            </a:r>
-          </a:p>
-        </p:txBody>
-      </p:sp>
-      <p:sp>
-        <p:nvSpPr>
-          <p:cNvPr id="6" name="TextBox 5"/>
-          <p:cNvSpPr txBox="1"/>
-          <p:nvPr/>
-        </p:nvSpPr>
-        <p:spPr>
-          <a:xfrm>
-            <a:off x="640000" y="2900000"/>
-            <a:ext cx="10912000" cy="3500000"/>
-          </a:xfrm>
-          <a:prstGeom prst="rect">
-            <a:avLst/>
-          </a:prstGeom>
-          <a:noFill/>
-        </p:spPr>
-        <p:txBody>
-          <a:bodyPr wrap="square">
-            <a:spAutoFit/>
-          </a:bodyPr>
-          <a:lstStyle/>
-          <a:p>
-            <a:pPr>
-              <a:spcAft>
-                <a:spcPts val="1080"/>
-              </a:spcAft>
-            </a:pPr>
-            <a:r>
-              <a:rPr sz="2400" b="1">
-                <a:solidFill>
-                  <a:srgbClr val="E8793A"/>
-                </a:solidFill>
-                <a:latin typeface="Nunito Sans"/>
-              </a:rPr>
-              <a:t>1. </a:t>
-            </a:r>
-            <a:r>
-              <a:rPr sz="2400" b="0">
-                <a:solidFill>
-                  <a:srgbClr val="1F2A44"/>
-                </a:solidFill>
-                <a:latin typeface="Nunito Sans"/>
-              </a:rPr>
-              <a:t>Ese chico da cinco </a:t>
-            </a:r>
-            <a:r>
-              <a:rPr sz="2400" b="1">
-                <a:solidFill>
-                  <a:srgbClr val="1F2A44"/>
-                </a:solidFill>
-                <a:latin typeface="Nunito Sans"/>
-              </a:rPr>
-              <a:t>ejemplos</a:t>
-            </a:r>
-            <a:r>
-              <a:rPr sz="2400" b="0">
-                <a:solidFill>
-                  <a:srgbClr val="1F2A44"/>
-                </a:solidFill>
-                <a:latin typeface="Nunito Sans"/>
-              </a:rPr>
-              <a:t>. Apoyan su idea, pero no la demuestran.</a:t>
-            </a:r>
-          </a:p>
-          <a:p>
-            <a:pPr>
-              <a:spcAft>
-                <a:spcPts val="1080"/>
-              </a:spcAft>
-            </a:pPr>
-            <a:r>
-              <a:rPr sz="2400" b="1">
-                <a:solidFill>
-                  <a:srgbClr val="E8793A"/>
-                </a:solidFill>
-                <a:latin typeface="Nunito Sans"/>
-              </a:rPr>
-              <a:t>2. </a:t>
-            </a:r>
-            <a:r>
-              <a:rPr sz="2400" b="0">
-                <a:solidFill>
-                  <a:srgbClr val="1F2A44"/>
-                </a:solidFill>
-                <a:latin typeface="Nunito Sans"/>
-              </a:rPr>
-              <a:t>Hay muchísimos youtubers con pocos seguidores que no ganan casi nada.</a:t>
-            </a:r>
-          </a:p>
-          <a:p>
-            <a:pPr>
-              <a:spcAft>
-                <a:spcPts val="1080"/>
-              </a:spcAft>
-            </a:pPr>
-            <a:r>
-              <a:rPr sz="2400" b="1">
-                <a:solidFill>
-                  <a:srgbClr val="E8793A"/>
-                </a:solidFill>
-                <a:latin typeface="Nunito Sans"/>
-              </a:rPr>
-              <a:t>3. </a:t>
-            </a:r>
-            <a:r>
-              <a:rPr sz="2400" b="0">
-                <a:solidFill>
-                  <a:srgbClr val="1F2A44"/>
-                </a:solidFill>
-                <a:latin typeface="Nunito Sans"/>
-              </a:rPr>
-              <a:t>Cada uno de ellos es un contraejemplo.</a:t>
-            </a:r>
-          </a:p>
-          <a:p>
-            <a:pPr>
-              <a:spcAft>
-                <a:spcPts val="1080"/>
-              </a:spcAft>
-            </a:pPr>
-            <a:r>
-              <a:rPr sz="2400" b="1">
-                <a:solidFill>
-                  <a:srgbClr val="E8793A"/>
-                </a:solidFill>
-                <a:latin typeface="Nunito Sans"/>
-              </a:rPr>
-              <a:t>4. </a:t>
-            </a:r>
-            <a:r>
-              <a:rPr sz="2400" b="0">
-                <a:solidFill>
-                  <a:srgbClr val="1F2A44"/>
-                </a:solidFill>
-                <a:latin typeface="Nunito Sans"/>
-              </a:rPr>
-              <a:t>Conclusión: cinco ejemplos no demuestran un «todos». Un contraejemplo sí lo tumba.</a:t>
+              <a:t>Un caso que lo mezcla todo</a:t>
             </a:r>
           </a:p>
         </p:txBody>
@@ -4334,7 +4065,7 @@
                 </a:solidFill>
                 <a:latin typeface="Nunito Sans"/>
               </a:rPr>
-              <a:t>BLOQUE 2 · CASOS RESUELTOS</a:t>
+              <a:t>BLOQUE 2 · UN CASO QUE LO MEZCLA TODO</a:t>
             </a:r>
           </a:p>
         </p:txBody>
@@ -4373,7 +4104,7 @@
                 </a:solidFill>
                 <a:latin typeface="Fredoka"/>
               </a:rPr>
-              <a:t>Caso 3 · Una mala analogía</a:t>
+              <a:t>Caso · El anuncio del doctor</a:t>
             </a:r>
           </a:p>
         </p:txBody>
@@ -4455,7 +4186,7 @@
                 </a:solidFill>
                 <a:latin typeface="Nunito Sans"/>
               </a:rPr>
-              <a:t>«Deberíamos poder mirar los apuntes en los exámenes: los médicos miran las radiografías cuando operan.»</a:t>
+              <a:t>Anuncio inventado: «Un doctor famoso en TikTok recomienda ZenSleep para dormir. ¡Ya lo usan un millón de personas!»</a:t>
             </a:r>
           </a:p>
         </p:txBody>
@@ -4503,7 +4234,7 @@
                 </a:solidFill>
                 <a:latin typeface="Nunito Sans"/>
               </a:rPr>
-              <a:t>Compara a un alumno en un examen con un médico trabajando.</a:t>
+              <a:t>«Doctor» famoso en TikTok: ¿doctor en qué? ¿Cobra? Creerlo solo por eso sería falacia de autoridad.</a:t>
             </a:r>
           </a:p>
           <a:p>
@@ -4528,7 +4259,7 @@
                 </a:solidFill>
                 <a:latin typeface="Nunito Sans"/>
               </a:rPr>
-              <a:t>¿Se parecen en lo que importa? No: el examen sirve para ver qué ha aprendido el alumno.</a:t>
+              <a:t>«Un millón de personas»: usarlo como prueba es ad populum. Comprarlo no es comprobarlo.</a:t>
             </a:r>
           </a:p>
           <a:p>
@@ -4553,7 +4284,7 @@
                 </a:solidFill>
                 <a:latin typeface="Nunito Sans"/>
               </a:rPr>
-              <a:t>Al médico no le están examinando: ya aprendió antes.</a:t>
+              <a:t>¿Qué haría falta? Saber qué dicen médicos del sueño que no cobren, y qué estudios hay.</a:t>
             </a:r>
           </a:p>
           <a:p>
@@ -4578,25 +4309,7 @@
                 </a:solidFill>
                 <a:latin typeface="Nunito Sans"/>
               </a:rPr>
-              <a:t>Conclusión: es una </a:t>
-            </a:r>
-            <a:r>
-              <a:rPr sz="2400" b="1">
-                <a:solidFill>
-                  <a:srgbClr val="1F2A44"/>
-                </a:solidFill>
-                <a:latin typeface="Nunito Sans"/>
-              </a:rPr>
-              <a:t>mala analogía</a:t>
-            </a:r>
-            <a:r>
-              <a:rPr sz="2400" b="0">
-                <a:solidFill>
-                  <a:srgbClr val="1F2A44"/>
-                </a:solidFill>
-                <a:latin typeface="Nunito Sans"/>
-              </a:rPr>
-              <a:t>: se parecen en algo que no importa para la conclusión.</a:t>
+              <a:t>Conclusión: dos falacias juntas. No me lo creo hasta ver pruebas.</a:t>
             </a:r>
           </a:p>
         </p:txBody>
@@ -4610,6 +4323,340 @@
 </file>
 
 <file path=ppt/slides/slide13.xml><?xml version="1.0" encoding="utf-8"?>
+<p:sld xmlns:a="http://schemas.openxmlformats.org/drawingml/2006/main" xmlns:p="http://schemas.openxmlformats.org/presentationml/2006/main" xmlns:r="http://schemas.openxmlformats.org/officeDocument/2006/relationships">
+  <p:cSld>
+    <p:bg>
+      <p:bgPr>
+        <a:solidFill>
+          <a:srgbClr val="F6C9A8"/>
+        </a:solidFill>
+        <a:effectLst/>
+      </p:bgPr>
+    </p:bg>
+    <p:spTree>
+      <p:nvGrpSpPr>
+        <p:cNvPr id="1" name=""/>
+        <p:cNvGrpSpPr/>
+        <p:nvPr/>
+      </p:nvGrpSpPr>
+      <p:grpSpPr/>
+      <p:sp>
+        <p:nvSpPr>
+          <p:cNvPr id="2" name="TextBox 1"/>
+          <p:cNvSpPr txBox="1"/>
+          <p:nvPr/>
+        </p:nvSpPr>
+        <p:spPr>
+          <a:xfrm>
+            <a:off x="640000" y="380000"/>
+            <a:ext cx="10912000" cy="420000"/>
+          </a:xfrm>
+          <a:prstGeom prst="rect">
+            <a:avLst/>
+          </a:prstGeom>
+          <a:noFill/>
+        </p:spPr>
+        <p:txBody>
+          <a:bodyPr wrap="square">
+            <a:spAutoFit/>
+          </a:bodyPr>
+          <a:lstStyle/>
+          <a:p>
+            <a:pPr>
+              <a:spcAft>
+                <a:spcPts val="630"/>
+              </a:spcAft>
+            </a:pPr>
+            <a:r>
+              <a:rPr sz="1400" b="1">
+                <a:solidFill>
+                  <a:srgbClr val="1F2A44"/>
+                </a:solidFill>
+                <a:latin typeface="Nunito Sans"/>
+              </a:rPr>
+              <a:t>CASO TRAMPA · BLOQUE 2 · UN CASO QUE LO MEZCLA TODO</a:t>
+            </a:r>
+          </a:p>
+        </p:txBody>
+      </p:sp>
+      <p:sp>
+        <p:nvSpPr>
+          <p:cNvPr id="3" name="TextBox 2"/>
+          <p:cNvSpPr txBox="1"/>
+          <p:nvPr/>
+        </p:nvSpPr>
+        <p:spPr>
+          <a:xfrm>
+            <a:off x="640000" y="760000"/>
+            <a:ext cx="10912000" cy="800000"/>
+          </a:xfrm>
+          <a:prstGeom prst="rect">
+            <a:avLst/>
+          </a:prstGeom>
+          <a:noFill/>
+        </p:spPr>
+        <p:txBody>
+          <a:bodyPr wrap="square">
+            <a:spAutoFit/>
+          </a:bodyPr>
+          <a:lstStyle/>
+          <a:p>
+            <a:pPr>
+              <a:spcAft>
+                <a:spcPts val="1710"/>
+              </a:spcAft>
+            </a:pPr>
+            <a:r>
+              <a:rPr sz="3800" b="1">
+                <a:solidFill>
+                  <a:srgbClr val="1F2A44"/>
+                </a:solidFill>
+                <a:latin typeface="Fredoka"/>
+              </a:rPr>
+              <a:t>⚠ ¿Doble falacia?</a:t>
+            </a:r>
+          </a:p>
+        </p:txBody>
+      </p:sp>
+      <p:sp>
+        <p:nvSpPr>
+          <p:cNvPr id="4" name="Rectangle 3"/>
+          <p:cNvSpPr/>
+          <p:nvPr/>
+        </p:nvSpPr>
+        <p:spPr>
+          <a:xfrm>
+            <a:off x="640000" y="1600000"/>
+            <a:ext cx="10912000" cy="1100000"/>
+          </a:xfrm>
+          <a:prstGeom prst="rect">
+            <a:avLst/>
+          </a:prstGeom>
+          <a:solidFill>
+            <a:srgbClr val="FBF7EF"/>
+          </a:solidFill>
+          <a:ln>
+            <a:noFill/>
+          </a:ln>
+        </p:spPr>
+        <p:style>
+          <a:lnRef idx="1">
+            <a:schemeClr val="accent1"/>
+          </a:lnRef>
+          <a:fillRef idx="3">
+            <a:schemeClr val="accent1"/>
+          </a:fillRef>
+          <a:effectRef idx="2">
+            <a:schemeClr val="accent1"/>
+          </a:effectRef>
+          <a:fontRef idx="minor">
+            <a:schemeClr val="lt1"/>
+          </a:fontRef>
+        </p:style>
+        <p:txBody>
+          <a:bodyPr rtlCol="0" anchor="ctr"/>
+          <a:lstStyle/>
+          <a:p>
+            <a:pPr algn="ctr"/>
+          </a:p>
+        </p:txBody>
+      </p:sp>
+      <p:sp>
+        <p:nvSpPr>
+          <p:cNvPr id="5" name="TextBox 4"/>
+          <p:cNvSpPr txBox="1"/>
+          <p:nvPr/>
+        </p:nvSpPr>
+        <p:spPr>
+          <a:xfrm>
+            <a:off x="840000" y="1650000"/>
+            <a:ext cx="10512000" cy="1000000"/>
+          </a:xfrm>
+          <a:prstGeom prst="rect">
+            <a:avLst/>
+          </a:prstGeom>
+          <a:noFill/>
+        </p:spPr>
+        <p:txBody>
+          <a:bodyPr wrap="square" anchor="ctr">
+            <a:spAutoFit/>
+          </a:bodyPr>
+          <a:lstStyle/>
+          <a:p>
+            <a:pPr>
+              <a:spcAft>
+                <a:spcPts val="1170"/>
+              </a:spcAft>
+            </a:pPr>
+            <a:r>
+              <a:rPr sz="2600" b="1">
+                <a:solidFill>
+                  <a:srgbClr val="1F2A44"/>
+                </a:solidFill>
+                <a:latin typeface="Nunito Sans"/>
+              </a:rPr>
+              <a:t>Un chico: «Sanidad y casi todos los médicos dicen que fumar causa cáncer, y lo repite todo el mundo. ¡Falacia de autoridad y ad populum!».</a:t>
+            </a:r>
+          </a:p>
+        </p:txBody>
+      </p:sp>
+      <p:sp>
+        <p:nvSpPr>
+          <p:cNvPr id="6" name="TextBox 5"/>
+          <p:cNvSpPr txBox="1"/>
+          <p:nvPr/>
+        </p:nvSpPr>
+        <p:spPr>
+          <a:xfrm>
+            <a:off x="640000" y="2900000"/>
+            <a:ext cx="10912000" cy="3500000"/>
+          </a:xfrm>
+          <a:prstGeom prst="rect">
+            <a:avLst/>
+          </a:prstGeom>
+          <a:noFill/>
+        </p:spPr>
+        <p:txBody>
+          <a:bodyPr wrap="square">
+            <a:spAutoFit/>
+          </a:bodyPr>
+          <a:lstStyle/>
+          <a:p>
+            <a:pPr>
+              <a:spcAft>
+                <a:spcPts val="1080"/>
+              </a:spcAft>
+            </a:pPr>
+            <a:r>
+              <a:rPr sz="2400" b="1">
+                <a:solidFill>
+                  <a:srgbClr val="E8793A"/>
+                </a:solidFill>
+                <a:latin typeface="Nunito Sans"/>
+              </a:rPr>
+              <a:t>1. </a:t>
+            </a:r>
+            <a:r>
+              <a:rPr sz="2400" b="0">
+                <a:solidFill>
+                  <a:srgbClr val="1F2A44"/>
+                </a:solidFill>
+                <a:latin typeface="Nunito Sans"/>
+              </a:rPr>
+              <a:t>Hay expertos y hay «todo el mundo»… ¿tiene razón ese chico?</a:t>
+            </a:r>
+          </a:p>
+          <a:p>
+            <a:pPr>
+              <a:spcAft>
+                <a:spcPts val="1080"/>
+              </a:spcAft>
+            </a:pPr>
+            <a:r>
+              <a:rPr sz="2400" b="1">
+                <a:solidFill>
+                  <a:srgbClr val="E8793A"/>
+                </a:solidFill>
+                <a:latin typeface="Nunito Sans"/>
+              </a:rPr>
+              <a:t>2. </a:t>
+            </a:r>
+            <a:r>
+              <a:rPr sz="2400" b="0">
+                <a:solidFill>
+                  <a:srgbClr val="1F2A44"/>
+                </a:solidFill>
+                <a:latin typeface="Nunito Sans"/>
+              </a:rPr>
+              <a:t>Parecen los dos trucos: «lo dicen los expertos» y «lo dice todo el mundo».</a:t>
+            </a:r>
+          </a:p>
+          <a:p>
+            <a:pPr>
+              <a:spcAft>
+                <a:spcPts val="1080"/>
+              </a:spcAft>
+            </a:pPr>
+            <a:r>
+              <a:rPr sz="2400" b="1">
+                <a:solidFill>
+                  <a:srgbClr val="E8793A"/>
+                </a:solidFill>
+                <a:latin typeface="Nunito Sans"/>
+              </a:rPr>
+              <a:t>3. </a:t>
+            </a:r>
+            <a:r>
+              <a:rPr sz="2400" b="0">
+                <a:solidFill>
+                  <a:srgbClr val="1F2A44"/>
+                </a:solidFill>
+                <a:latin typeface="Nunito Sans"/>
+              </a:rPr>
+              <a:t>Pero son expertos de su campo, casi todos de acuerdo y con muchísimos estudios: es consenso.</a:t>
+            </a:r>
+          </a:p>
+          <a:p>
+            <a:pPr>
+              <a:spcAft>
+                <a:spcPts val="1080"/>
+              </a:spcAft>
+            </a:pPr>
+            <a:r>
+              <a:rPr sz="2400" b="1">
+                <a:solidFill>
+                  <a:srgbClr val="E8793A"/>
+                </a:solidFill>
+                <a:latin typeface="Nunito Sans"/>
+              </a:rPr>
+              <a:t>4. </a:t>
+            </a:r>
+            <a:r>
+              <a:rPr sz="2400" b="0">
+                <a:solidFill>
+                  <a:srgbClr val="1F2A44"/>
+                </a:solidFill>
+                <a:latin typeface="Nunito Sans"/>
+              </a:rPr>
+              <a:t>Y aquí «todo el mundo» repite algo comprobado, no una moda.</a:t>
+            </a:r>
+          </a:p>
+          <a:p>
+            <a:pPr>
+              <a:spcAft>
+                <a:spcPts val="1080"/>
+              </a:spcAft>
+            </a:pPr>
+            <a:r>
+              <a:rPr sz="2400" b="1">
+                <a:solidFill>
+                  <a:srgbClr val="E8793A"/>
+                </a:solidFill>
+                <a:latin typeface="Nunito Sans"/>
+              </a:rPr>
+              <a:t>5. </a:t>
+            </a:r>
+            <a:r>
+              <a:rPr sz="2400" b="0">
+                <a:solidFill>
+                  <a:srgbClr val="1F2A44"/>
+                </a:solidFill>
+                <a:latin typeface="Nunito Sans"/>
+              </a:rPr>
+              <a:t>Conclusión: no es falacia. Fiarse del consenso es razonable; el error es fiarse sin mirar por qué.</a:t>
+            </a:r>
+          </a:p>
+        </p:txBody>
+      </p:sp>
+    </p:spTree>
+  </p:cSld>
+  <p:clrMapOvr>
+    <a:masterClrMapping/>
+  </p:clrMapOvr>
+</p:sld>
+</file>
+
+<file path=ppt/slides/slide14.xml><?xml version="1.0" encoding="utf-8"?>
 <p:sld xmlns:a="http://schemas.openxmlformats.org/drawingml/2006/main" xmlns:p="http://schemas.openxmlformats.org/presentationml/2006/main" xmlns:r="http://schemas.openxmlformats.org/officeDocument/2006/relationships">
   <p:cSld>
     <p:bg>
@@ -4661,7 +4708,7 @@
                 </a:solidFill>
                 <a:latin typeface="Nunito Sans"/>
               </a:rPr>
-              <a:t>BLOQUE 2 · CASOS RESUELTOS</a:t>
+              <a:t>LO DE HOY EN TRES LÍNEAS</a:t>
             </a:r>
           </a:p>
         </p:txBody>
@@ -4700,64 +4747,21 @@
                 </a:solidFill>
                 <a:latin typeface="Fredoka"/>
               </a:rPr>
-              <a:t>Caso 4 · Una buena analogía</a:t>
-            </a:r>
-          </a:p>
-        </p:txBody>
-      </p:sp>
-      <p:sp>
-        <p:nvSpPr>
-          <p:cNvPr id="4" name="Rectangle 3"/>
-          <p:cNvSpPr/>
-          <p:nvPr/>
-        </p:nvSpPr>
-        <p:spPr>
-          <a:xfrm>
-            <a:off x="640000" y="1600000"/>
-            <a:ext cx="10912000" cy="1100000"/>
-          </a:xfrm>
-          <a:prstGeom prst="rect">
-            <a:avLst/>
-          </a:prstGeom>
-          <a:solidFill>
-            <a:srgbClr val="FFFFFF"/>
-          </a:solidFill>
-          <a:ln>
-            <a:noFill/>
-          </a:ln>
-        </p:spPr>
-        <p:style>
-          <a:lnRef idx="1">
-            <a:schemeClr val="accent1"/>
-          </a:lnRef>
-          <a:fillRef idx="3">
-            <a:schemeClr val="accent1"/>
-          </a:fillRef>
-          <a:effectRef idx="2">
-            <a:schemeClr val="accent1"/>
-          </a:effectRef>
-          <a:fontRef idx="minor">
-            <a:schemeClr val="lt1"/>
-          </a:fontRef>
-        </p:style>
-        <p:txBody>
-          <a:bodyPr rtlCol="0" anchor="ctr"/>
-          <a:lstStyle/>
-          <a:p>
-            <a:pPr algn="ctr"/>
-          </a:p>
-        </p:txBody>
-      </p:sp>
-      <p:sp>
-        <p:nvSpPr>
-          <p:cNvPr id="5" name="TextBox 4"/>
+              <a:t>Escríbelo tú primero, sin mirar</a:t>
+            </a:r>
+          </a:p>
+        </p:txBody>
+      </p:sp>
+      <p:sp>
+        <p:nvSpPr>
+          <p:cNvPr id="4" name="TextBox 3"/>
           <p:cNvSpPr txBox="1"/>
           <p:nvPr/>
         </p:nvSpPr>
         <p:spPr>
           <a:xfrm>
-            <a:off x="840000" y="1650000"/>
-            <a:ext cx="10512000" cy="1000000"/>
+            <a:off x="640000" y="1800000"/>
+            <a:ext cx="10912000" cy="1500000"/>
           </a:xfrm>
           <a:prstGeom prst="rect">
             <a:avLst/>
@@ -4765,7 +4769,7 @@
           <a:noFill/>
         </p:spPr>
         <p:txBody>
-          <a:bodyPr wrap="square" anchor="ctr">
+          <a:bodyPr wrap="square">
             <a:spAutoFit/>
           </a:bodyPr>
           <a:lstStyle/>
@@ -4776,129 +4780,13 @@
               </a:spcAft>
             </a:pPr>
             <a:r>
-              <a:rPr sz="2600" b="1">
-                <a:solidFill>
-                  <a:srgbClr val="1F2A44"/>
+              <a:rPr sz="2600" b="0">
+                <a:solidFill>
+                  <a:srgbClr val="4A5568"/>
                 </a:solidFill>
                 <a:latin typeface="Nunito Sans"/>
               </a:rPr>
-              <a:t>«Igual que no dejas la puerta de casa abierta al salir, no dejes el móvil sin contraseña.»</a:t>
-            </a:r>
-          </a:p>
-        </p:txBody>
-      </p:sp>
-      <p:sp>
-        <p:nvSpPr>
-          <p:cNvPr id="6" name="TextBox 5"/>
-          <p:cNvSpPr txBox="1"/>
-          <p:nvPr/>
-        </p:nvSpPr>
-        <p:spPr>
-          <a:xfrm>
-            <a:off x="640000" y="2900000"/>
-            <a:ext cx="10912000" cy="3500000"/>
-          </a:xfrm>
-          <a:prstGeom prst="rect">
-            <a:avLst/>
-          </a:prstGeom>
-          <a:noFill/>
-        </p:spPr>
-        <p:txBody>
-          <a:bodyPr wrap="square">
-            <a:spAutoFit/>
-          </a:bodyPr>
-          <a:lstStyle/>
-          <a:p>
-            <a:pPr>
-              <a:spcAft>
-                <a:spcPts val="1080"/>
-              </a:spcAft>
-            </a:pPr>
-            <a:r>
-              <a:rPr sz="2400" b="1">
-                <a:solidFill>
-                  <a:srgbClr val="E8793A"/>
-                </a:solidFill>
-                <a:latin typeface="Nunito Sans"/>
-              </a:rPr>
-              <a:t>1. </a:t>
-            </a:r>
-            <a:r>
-              <a:rPr sz="2400" b="0">
-                <a:solidFill>
-                  <a:srgbClr val="1F2A44"/>
-                </a:solidFill>
-                <a:latin typeface="Nunito Sans"/>
-              </a:rPr>
-              <a:t>Compara la casa y el móvil.</a:t>
-            </a:r>
-          </a:p>
-          <a:p>
-            <a:pPr>
-              <a:spcAft>
-                <a:spcPts val="1080"/>
-              </a:spcAft>
-            </a:pPr>
-            <a:r>
-              <a:rPr sz="2400" b="1">
-                <a:solidFill>
-                  <a:srgbClr val="E8793A"/>
-                </a:solidFill>
-                <a:latin typeface="Nunito Sans"/>
-              </a:rPr>
-              <a:t>2. </a:t>
-            </a:r>
-            <a:r>
-              <a:rPr sz="2400" b="0">
-                <a:solidFill>
-                  <a:srgbClr val="1F2A44"/>
-                </a:solidFill>
-                <a:latin typeface="Nunito Sans"/>
-              </a:rPr>
-              <a:t>¿Se parecen en lo que importa? Sí: los dos guardan cosas privadas que otros podrían coger.</a:t>
-            </a:r>
-          </a:p>
-          <a:p>
-            <a:pPr>
-              <a:spcAft>
-                <a:spcPts val="1080"/>
-              </a:spcAft>
-            </a:pPr>
-            <a:r>
-              <a:rPr sz="2400" b="1">
-                <a:solidFill>
-                  <a:srgbClr val="E8793A"/>
-                </a:solidFill>
-                <a:latin typeface="Nunito Sans"/>
-              </a:rPr>
-              <a:t>3. </a:t>
-            </a:r>
-            <a:r>
-              <a:rPr sz="2400" b="0">
-                <a:solidFill>
-                  <a:srgbClr val="1F2A44"/>
-                </a:solidFill>
-                <a:latin typeface="Nunito Sans"/>
-              </a:rPr>
-              <a:t>Conclusión: es una </a:t>
-            </a:r>
-            <a:r>
-              <a:rPr sz="2400" b="1">
-                <a:solidFill>
-                  <a:srgbClr val="1F2A44"/>
-                </a:solidFill>
-                <a:latin typeface="Nunito Sans"/>
-              </a:rPr>
-              <a:t>buena analogía</a:t>
-            </a:r>
-            <a:r>
-              <a:rPr sz="2400" b="0">
-                <a:solidFill>
-                  <a:srgbClr val="1F2A44"/>
-                </a:solidFill>
-                <a:latin typeface="Nunito Sans"/>
-              </a:rPr>
-              <a:t>: se parecen en lo importante para la conclusión.</a:t>
+              <a:t>Dos minutos. Después lo comparamos.</a:t>
             </a:r>
           </a:p>
         </p:txBody>
@@ -4911,7 +4799,170 @@
 </p:sld>
 </file>
 
-<file path=ppt/slides/slide14.xml><?xml version="1.0" encoding="utf-8"?>
+<file path=ppt/slides/slide15.xml><?xml version="1.0" encoding="utf-8"?>
+<p:sld xmlns:a="http://schemas.openxmlformats.org/drawingml/2006/main" xmlns:p="http://schemas.openxmlformats.org/presentationml/2006/main" xmlns:r="http://schemas.openxmlformats.org/officeDocument/2006/relationships">
+  <p:cSld>
+    <p:bg>
+      <p:bgPr>
+        <a:solidFill>
+          <a:srgbClr val="FBF7EF"/>
+        </a:solidFill>
+        <a:effectLst/>
+      </p:bgPr>
+    </p:bg>
+    <p:spTree>
+      <p:nvGrpSpPr>
+        <p:cNvPr id="1" name=""/>
+        <p:cNvGrpSpPr/>
+        <p:nvPr/>
+      </p:nvGrpSpPr>
+      <p:grpSpPr/>
+      <p:sp>
+        <p:nvSpPr>
+          <p:cNvPr id="2" name="TextBox 1"/>
+          <p:cNvSpPr txBox="1"/>
+          <p:nvPr/>
+        </p:nvSpPr>
+        <p:spPr>
+          <a:xfrm>
+            <a:off x="640000" y="380000"/>
+            <a:ext cx="10912000" cy="420000"/>
+          </a:xfrm>
+          <a:prstGeom prst="rect">
+            <a:avLst/>
+          </a:prstGeom>
+          <a:noFill/>
+        </p:spPr>
+        <p:txBody>
+          <a:bodyPr wrap="square">
+            <a:spAutoFit/>
+          </a:bodyPr>
+          <a:lstStyle/>
+          <a:p>
+            <a:pPr>
+              <a:spcAft>
+                <a:spcPts val="630"/>
+              </a:spcAft>
+            </a:pPr>
+            <a:r>
+              <a:rPr sz="1400" b="1">
+                <a:solidFill>
+                  <a:srgbClr val="E8793A"/>
+                </a:solidFill>
+                <a:latin typeface="Nunito Sans"/>
+              </a:rPr>
+              <a:t>LO DE HOY EN TRES LÍNEAS</a:t>
+            </a:r>
+          </a:p>
+        </p:txBody>
+      </p:sp>
+      <p:sp>
+        <p:nvSpPr>
+          <p:cNvPr id="3" name="TextBox 2"/>
+          <p:cNvSpPr txBox="1"/>
+          <p:nvPr/>
+        </p:nvSpPr>
+        <p:spPr>
+          <a:xfrm>
+            <a:off x="640000" y="1300000"/>
+            <a:ext cx="10912000" cy="4800000"/>
+          </a:xfrm>
+          <a:prstGeom prst="rect">
+            <a:avLst/>
+          </a:prstGeom>
+          <a:noFill/>
+        </p:spPr>
+        <p:txBody>
+          <a:bodyPr wrap="square">
+            <a:spAutoFit/>
+          </a:bodyPr>
+          <a:lstStyle/>
+          <a:p>
+            <a:pPr>
+              <a:spcAft>
+                <a:spcPts val="1350"/>
+              </a:spcAft>
+            </a:pPr>
+            <a:r>
+              <a:rPr sz="3000" b="1">
+                <a:solidFill>
+                  <a:srgbClr val="E8793A"/>
+                </a:solidFill>
+                <a:latin typeface="Nunito Sans"/>
+              </a:rPr>
+              <a:t>1. </a:t>
+            </a:r>
+            <a:r>
+              <a:rPr sz="3000" b="0">
+                <a:solidFill>
+                  <a:srgbClr val="1F2A44"/>
+                </a:solidFill>
+                <a:latin typeface="Nunito Sans"/>
+              </a:rPr>
+              <a:t>La autoridad por poder manda; la autoridad por saber da razones.</a:t>
+            </a:r>
+          </a:p>
+          <a:p>
+            <a:pPr>
+              <a:spcAft>
+                <a:spcPts val="1350"/>
+              </a:spcAft>
+            </a:pPr>
+            <a:r>
+              <a:rPr sz="3000" b="1">
+                <a:solidFill>
+                  <a:srgbClr val="E8793A"/>
+                </a:solidFill>
+                <a:latin typeface="Nunito Sans"/>
+              </a:rPr>
+              <a:t>2. </a:t>
+            </a:r>
+            <a:r>
+              <a:rPr sz="3000" b="0">
+                <a:solidFill>
+                  <a:srgbClr val="1F2A44"/>
+                </a:solidFill>
+                <a:latin typeface="Nunito Sans"/>
+              </a:rPr>
+              <a:t>La falacia de autoridad y ad populum usan a otros en lugar de pruebas.</a:t>
+            </a:r>
+          </a:p>
+          <a:p>
+            <a:pPr>
+              <a:spcAft>
+                <a:spcPts val="1350"/>
+              </a:spcAft>
+            </a:pPr>
+            <a:r>
+              <a:rPr sz="3000" b="1">
+                <a:solidFill>
+                  <a:srgbClr val="E8793A"/>
+                </a:solidFill>
+                <a:latin typeface="Nunito Sans"/>
+              </a:rPr>
+              <a:t>3. </a:t>
+            </a:r>
+            <a:r>
+              <a:rPr sz="3000" b="0">
+                <a:solidFill>
+                  <a:srgbClr val="1F2A44"/>
+                </a:solidFill>
+                <a:latin typeface="Nunito Sans"/>
+              </a:rPr>
+              <a:t>Asch y Milgram muestran que el grupo y la autoridad nos empujan, pero muchos resisten.</a:t>
+            </a:r>
+          </a:p>
+        </p:txBody>
+      </p:sp>
+    </p:spTree>
+  </p:cSld>
+  <p:clrMapOvr>
+    <a:masterClrMapping/>
+  </p:clrMapOvr>
+</p:sld>
+</file>
+
+<file path=ppt/slides/slide16.xml><?xml version="1.0" encoding="utf-8"?>
 <p:sld xmlns:a="http://schemas.openxmlformats.org/drawingml/2006/main" xmlns:p="http://schemas.openxmlformats.org/presentationml/2006/main" xmlns:r="http://schemas.openxmlformats.org/officeDocument/2006/relationships">
   <p:cSld>
     <p:bg>
@@ -4937,110 +4988,6 @@
         </p:nvSpPr>
         <p:spPr>
           <a:xfrm>
-            <a:off x="640000" y="2300000"/>
-            <a:ext cx="10912000" cy="500000"/>
-          </a:xfrm>
-          <a:prstGeom prst="rect">
-            <a:avLst/>
-          </a:prstGeom>
-          <a:noFill/>
-        </p:spPr>
-        <p:txBody>
-          <a:bodyPr wrap="square">
-            <a:spAutoFit/>
-          </a:bodyPr>
-          <a:lstStyle/>
-          <a:p>
-            <a:pPr>
-              <a:spcAft>
-                <a:spcPts val="810"/>
-              </a:spcAft>
-            </a:pPr>
-            <a:r>
-              <a:rPr sz="1800" b="1">
-                <a:solidFill>
-                  <a:srgbClr val="F4B183"/>
-                </a:solidFill>
-                <a:latin typeface="Nunito Sans"/>
-              </a:rPr>
-              <a:t>BLOQUE 3</a:t>
-            </a:r>
-          </a:p>
-        </p:txBody>
-      </p:sp>
-      <p:sp>
-        <p:nvSpPr>
-          <p:cNvPr id="3" name="TextBox 2"/>
-          <p:cNvSpPr txBox="1"/>
-          <p:nvPr/>
-        </p:nvSpPr>
-        <p:spPr>
-          <a:xfrm>
-            <a:off x="640000" y="2800000"/>
-            <a:ext cx="10912000" cy="800000"/>
-          </a:xfrm>
-          <a:prstGeom prst="rect">
-            <a:avLst/>
-          </a:prstGeom>
-          <a:noFill/>
-        </p:spPr>
-        <p:txBody>
-          <a:bodyPr wrap="square">
-            <a:spAutoFit/>
-          </a:bodyPr>
-          <a:lstStyle/>
-          <a:p>
-            <a:pPr>
-              <a:spcAft>
-                <a:spcPts val="2160"/>
-              </a:spcAft>
-            </a:pPr>
-            <a:r>
-              <a:rPr sz="4800" b="1">
-                <a:solidFill>
-                  <a:srgbClr val="FBF7EF"/>
-                </a:solidFill>
-                <a:latin typeface="Fredoka"/>
-              </a:rPr>
-              <a:t>Ojo con los contraejemplos</a:t>
-            </a:r>
-          </a:p>
-        </p:txBody>
-      </p:sp>
-    </p:spTree>
-  </p:cSld>
-  <p:clrMapOvr>
-    <a:masterClrMapping/>
-  </p:clrMapOvr>
-</p:sld>
-</file>
-
-<file path=ppt/slides/slide15.xml><?xml version="1.0" encoding="utf-8"?>
-<p:sld xmlns:a="http://schemas.openxmlformats.org/drawingml/2006/main" xmlns:p="http://schemas.openxmlformats.org/presentationml/2006/main" xmlns:r="http://schemas.openxmlformats.org/officeDocument/2006/relationships">
-  <p:cSld>
-    <p:bg>
-      <p:bgPr>
-        <a:solidFill>
-          <a:srgbClr val="F6C9A8"/>
-        </a:solidFill>
-        <a:effectLst/>
-      </p:bgPr>
-    </p:bg>
-    <p:spTree>
-      <p:nvGrpSpPr>
-        <p:cNvPr id="1" name=""/>
-        <p:cNvGrpSpPr/>
-        <p:nvPr/>
-      </p:nvGrpSpPr>
-      <p:grpSpPr/>
-      <p:sp>
-        <p:nvSpPr>
-          <p:cNvPr id="2" name="TextBox 1"/>
-          <p:cNvSpPr txBox="1"/>
-          <p:nvPr/>
-        </p:nvSpPr>
-        <p:spPr>
-          <a:xfrm>
             <a:off x="640000" y="380000"/>
             <a:ext cx="10912000" cy="420000"/>
           </a:xfrm>
@@ -5063,11 +5010,11 @@
             <a:r>
               <a:rPr sz="1400" b="1">
                 <a:solidFill>
-                  <a:srgbClr val="1F2A44"/>
+                  <a:srgbClr val="F4B183"/>
                 </a:solidFill>
                 <a:latin typeface="Nunito Sans"/>
               </a:rPr>
-              <a:t>CASO TRAMPA · BLOQUE 3 · OJO CON LOS CONTRAEJEMPLOS</a:t>
+              <a:t>AHORA, LA HOJA DEL DÍA</a:t>
             </a:r>
           </a:p>
         </p:txBody>
@@ -5102,11 +5049,11 @@
             <a:r>
               <a:rPr sz="3800" b="1">
                 <a:solidFill>
-                  <a:srgbClr val="1F2A44"/>
+                  <a:srgbClr val="FBF7EF"/>
                 </a:solidFill>
                 <a:latin typeface="Fredoka"/>
               </a:rPr>
-              <a:t>⚠ ¿Un contraejemplo lo tumba todo?</a:t>
+              <a:t>20 minutos · individual · en silencio</a:t>
             </a:r>
           </a:p>
         </p:txBody>
@@ -5119,8 +5066,8 @@
         </p:nvSpPr>
         <p:spPr>
           <a:xfrm>
-            <a:off x="640000" y="1600000"/>
-            <a:ext cx="10912000" cy="1100000"/>
+            <a:off x="640000" y="2000000"/>
+            <a:ext cx="3504000" cy="1800000"/>
           </a:xfrm>
           <a:prstGeom prst="rect">
             <a:avLst/>
@@ -5162,8 +5109,8 @@
         </p:nvSpPr>
         <p:spPr>
           <a:xfrm>
-            <a:off x="840000" y="1650000"/>
-            <a:ext cx="10512000" cy="1000000"/>
+            <a:off x="790000" y="2100000"/>
+            <a:ext cx="3204000" cy="700000"/>
           </a:xfrm>
           <a:prstGeom prst="rect">
             <a:avLst/>
@@ -5171,24 +5118,24 @@
           <a:noFill/>
         </p:spPr>
         <p:txBody>
-          <a:bodyPr wrap="square" anchor="ctr">
+          <a:bodyPr wrap="square">
             <a:spAutoFit/>
           </a:bodyPr>
           <a:lstStyle/>
           <a:p>
             <a:pPr>
               <a:spcAft>
-                <a:spcPts val="1170"/>
+                <a:spcPts val="990"/>
               </a:spcAft>
             </a:pPr>
             <a:r>
-              <a:rPr sz="2600" b="1">
-                <a:solidFill>
-                  <a:srgbClr val="1F2A44"/>
+              <a:rPr sz="2200" b="1">
+                <a:solidFill>
+                  <a:srgbClr val="E8793A"/>
                 </a:solidFill>
                 <a:latin typeface="Nunito Sans"/>
               </a:rPr>
-              <a:t>Una chica: «A los perros les encanta salir a pasear». Un chico: «El mío odia pasear: se esconde debajo de la cama».</a:t>
+              <a:t>Peldaño 1 · Todos</a:t>
             </a:r>
           </a:p>
         </p:txBody>
@@ -5201,8 +5148,8 @@
         </p:nvSpPr>
         <p:spPr>
           <a:xfrm>
-            <a:off x="640000" y="2900000"/>
-            <a:ext cx="10912000" cy="3500000"/>
+            <a:off x="790000" y="2900000"/>
+            <a:ext cx="3204000" cy="700000"/>
           </a:xfrm>
           <a:prstGeom prst="rect">
             <a:avLst/>
@@ -5217,710 +5164,30 @@
           <a:p>
             <a:pPr>
               <a:spcAft>
-                <a:spcPts val="1080"/>
+                <a:spcPts val="900"/>
               </a:spcAft>
             </a:pPr>
             <a:r>
-              <a:rPr sz="2400" b="1">
-                <a:solidFill>
-                  <a:srgbClr val="E8793A"/>
+              <a:rPr sz="2000" b="0">
+                <a:solidFill>
+                  <a:srgbClr val="4A5568"/>
                 </a:solidFill>
                 <a:latin typeface="Nunito Sans"/>
               </a:rPr>
-              <a:t>1. </a:t>
-            </a:r>
-            <a:r>
-              <a:rPr sz="2400" b="0">
-                <a:solidFill>
-                  <a:srgbClr val="1F2A44"/>
-                </a:solidFill>
-                <a:latin typeface="Nunito Sans"/>
-              </a:rPr>
-              <a:t>El chico tiene un contraejemplo. ¿La frase de la chica es falsa?</a:t>
-            </a:r>
-          </a:p>
-          <a:p>
-            <a:pPr>
-              <a:spcAft>
-                <a:spcPts val="1080"/>
-              </a:spcAft>
-            </a:pPr>
-            <a:r>
-              <a:rPr sz="2400" b="1">
-                <a:solidFill>
-                  <a:srgbClr val="E8793A"/>
-                </a:solidFill>
-                <a:latin typeface="Nunito Sans"/>
-              </a:rPr>
-              <a:t>2. </a:t>
-            </a:r>
-            <a:r>
-              <a:rPr sz="2400" b="0">
-                <a:solidFill>
-                  <a:srgbClr val="1F2A44"/>
-                </a:solidFill>
-                <a:latin typeface="Nunito Sans"/>
-              </a:rPr>
-              <a:t>La chica no dice «todos los perros»: dice cómo </a:t>
-            </a:r>
-            <a:r>
-              <a:rPr sz="2400" b="1">
-                <a:solidFill>
-                  <a:srgbClr val="1F2A44"/>
-                </a:solidFill>
-                <a:latin typeface="Nunito Sans"/>
-              </a:rPr>
-              <a:t>suelen</a:t>
-            </a:r>
-            <a:r>
-              <a:rPr sz="2400" b="0">
-                <a:solidFill>
-                  <a:srgbClr val="1F2A44"/>
-                </a:solidFill>
-                <a:latin typeface="Nunito Sans"/>
-              </a:rPr>
-              <a:t> ser.</a:t>
-            </a:r>
-          </a:p>
-          <a:p>
-            <a:pPr>
-              <a:spcAft>
-                <a:spcPts val="1080"/>
-              </a:spcAft>
-            </a:pPr>
-            <a:r>
-              <a:rPr sz="2400" b="1">
-                <a:solidFill>
-                  <a:srgbClr val="E8793A"/>
-                </a:solidFill>
-                <a:latin typeface="Nunito Sans"/>
-              </a:rPr>
-              <a:t>3. </a:t>
-            </a:r>
-            <a:r>
-              <a:rPr sz="2400" b="0">
-                <a:solidFill>
-                  <a:srgbClr val="1F2A44"/>
-                </a:solidFill>
-                <a:latin typeface="Nunito Sans"/>
-              </a:rPr>
-              <a:t>Un perro que no quiere pasear es una excepción, y «suelen» admite excepciones.</a:t>
-            </a:r>
-          </a:p>
-          <a:p>
-            <a:pPr>
-              <a:spcAft>
-                <a:spcPts val="1080"/>
-              </a:spcAft>
-            </a:pPr>
-            <a:r>
-              <a:rPr sz="2400" b="1">
-                <a:solidFill>
-                  <a:srgbClr val="E8793A"/>
-                </a:solidFill>
-                <a:latin typeface="Nunito Sans"/>
-              </a:rPr>
-              <a:t>4. </a:t>
-            </a:r>
-            <a:r>
-              <a:rPr sz="2400" b="0">
-                <a:solidFill>
-                  <a:srgbClr val="1F2A44"/>
-                </a:solidFill>
-                <a:latin typeface="Nunito Sans"/>
-              </a:rPr>
-              <a:t>Para tumbar su frase haría falta ver que la mayoría no quiere pasear.</a:t>
-            </a:r>
-          </a:p>
-          <a:p>
-            <a:pPr>
-              <a:spcAft>
-                <a:spcPts val="1080"/>
-              </a:spcAft>
-            </a:pPr>
-            <a:r>
-              <a:rPr sz="2400" b="1">
-                <a:solidFill>
-                  <a:srgbClr val="E8793A"/>
-                </a:solidFill>
-                <a:latin typeface="Nunito Sans"/>
-              </a:rPr>
-              <a:t>5. </a:t>
-            </a:r>
-            <a:r>
-              <a:rPr sz="2400" b="0">
-                <a:solidFill>
-                  <a:srgbClr val="1F2A44"/>
-                </a:solidFill>
-                <a:latin typeface="Nunito Sans"/>
-              </a:rPr>
-              <a:t>Conclusión: un contraejemplo tumba un «todos», no un «casi todos». Mira bien qué dice la frase.</a:t>
-            </a:r>
-          </a:p>
-        </p:txBody>
-      </p:sp>
-    </p:spTree>
-  </p:cSld>
-  <p:clrMapOvr>
-    <a:masterClrMapping/>
-  </p:clrMapOvr>
-</p:sld>
-</file>
-
-<file path=ppt/slides/slide16.xml><?xml version="1.0" encoding="utf-8"?>
-<p:sld xmlns:a="http://schemas.openxmlformats.org/drawingml/2006/main" xmlns:p="http://schemas.openxmlformats.org/presentationml/2006/main" xmlns:r="http://schemas.openxmlformats.org/officeDocument/2006/relationships">
-  <p:cSld>
-    <p:bg>
-      <p:bgPr>
-        <a:solidFill>
-          <a:srgbClr val="FBF7EF"/>
-        </a:solidFill>
-        <a:effectLst/>
-      </p:bgPr>
-    </p:bg>
-    <p:spTree>
-      <p:nvGrpSpPr>
-        <p:cNvPr id="1" name=""/>
-        <p:cNvGrpSpPr/>
-        <p:nvPr/>
-      </p:nvGrpSpPr>
-      <p:grpSpPr/>
-      <p:sp>
-        <p:nvSpPr>
-          <p:cNvPr id="2" name="TextBox 1"/>
-          <p:cNvSpPr txBox="1"/>
-          <p:nvPr/>
-        </p:nvSpPr>
-        <p:spPr>
-          <a:xfrm>
-            <a:off x="640000" y="380000"/>
-            <a:ext cx="10912000" cy="420000"/>
-          </a:xfrm>
-          <a:prstGeom prst="rect">
-            <a:avLst/>
-          </a:prstGeom>
-          <a:noFill/>
-        </p:spPr>
-        <p:txBody>
-          <a:bodyPr wrap="square">
-            <a:spAutoFit/>
-          </a:bodyPr>
-          <a:lstStyle/>
-          <a:p>
-            <a:pPr>
-              <a:spcAft>
-                <a:spcPts val="630"/>
-              </a:spcAft>
-            </a:pPr>
-            <a:r>
-              <a:rPr sz="1400" b="1">
-                <a:solidFill>
-                  <a:srgbClr val="E8793A"/>
-                </a:solidFill>
-                <a:latin typeface="Nunito Sans"/>
-              </a:rPr>
-              <a:t>LO DE HOY EN TRES LÍNEAS</a:t>
-            </a:r>
-          </a:p>
-        </p:txBody>
-      </p:sp>
-      <p:sp>
-        <p:nvSpPr>
-          <p:cNvPr id="3" name="TextBox 2"/>
-          <p:cNvSpPr txBox="1"/>
-          <p:nvPr/>
-        </p:nvSpPr>
-        <p:spPr>
-          <a:xfrm>
-            <a:off x="640000" y="760000"/>
-            <a:ext cx="10912000" cy="800000"/>
-          </a:xfrm>
-          <a:prstGeom prst="rect">
-            <a:avLst/>
-          </a:prstGeom>
-          <a:noFill/>
-        </p:spPr>
-        <p:txBody>
-          <a:bodyPr wrap="square">
-            <a:spAutoFit/>
-          </a:bodyPr>
-          <a:lstStyle/>
-          <a:p>
-            <a:pPr>
-              <a:spcAft>
-                <a:spcPts val="1710"/>
-              </a:spcAft>
-            </a:pPr>
-            <a:r>
-              <a:rPr sz="3800" b="1">
-                <a:solidFill>
-                  <a:srgbClr val="1F2A44"/>
-                </a:solidFill>
-                <a:latin typeface="Fredoka"/>
-              </a:rPr>
-              <a:t>Escríbelo tú primero, sin mirar</a:t>
-            </a:r>
-          </a:p>
-        </p:txBody>
-      </p:sp>
-      <p:sp>
-        <p:nvSpPr>
-          <p:cNvPr id="4" name="TextBox 3"/>
-          <p:cNvSpPr txBox="1"/>
-          <p:nvPr/>
-        </p:nvSpPr>
-        <p:spPr>
-          <a:xfrm>
-            <a:off x="640000" y="1800000"/>
-            <a:ext cx="10912000" cy="1500000"/>
-          </a:xfrm>
-          <a:prstGeom prst="rect">
-            <a:avLst/>
-          </a:prstGeom>
-          <a:noFill/>
-        </p:spPr>
-        <p:txBody>
-          <a:bodyPr wrap="square">
-            <a:spAutoFit/>
-          </a:bodyPr>
-          <a:lstStyle/>
-          <a:p>
-            <a:pPr>
-              <a:spcAft>
-                <a:spcPts val="1170"/>
-              </a:spcAft>
-            </a:pPr>
-            <a:r>
-              <a:rPr sz="2600" b="0">
-                <a:solidFill>
-                  <a:srgbClr val="4A5568"/>
-                </a:solidFill>
-                <a:latin typeface="Nunito Sans"/>
-              </a:rPr>
-              <a:t>Dos minutos. Después lo comparamos.</a:t>
-            </a:r>
-          </a:p>
-        </p:txBody>
-      </p:sp>
-    </p:spTree>
-  </p:cSld>
-  <p:clrMapOvr>
-    <a:masterClrMapping/>
-  </p:clrMapOvr>
-</p:sld>
-</file>
-
-<file path=ppt/slides/slide17.xml><?xml version="1.0" encoding="utf-8"?>
-<p:sld xmlns:a="http://schemas.openxmlformats.org/drawingml/2006/main" xmlns:p="http://schemas.openxmlformats.org/presentationml/2006/main" xmlns:r="http://schemas.openxmlformats.org/officeDocument/2006/relationships">
-  <p:cSld>
-    <p:bg>
-      <p:bgPr>
-        <a:solidFill>
-          <a:srgbClr val="FBF7EF"/>
-        </a:solidFill>
-        <a:effectLst/>
-      </p:bgPr>
-    </p:bg>
-    <p:spTree>
-      <p:nvGrpSpPr>
-        <p:cNvPr id="1" name=""/>
-        <p:cNvGrpSpPr/>
-        <p:nvPr/>
-      </p:nvGrpSpPr>
-      <p:grpSpPr/>
-      <p:sp>
-        <p:nvSpPr>
-          <p:cNvPr id="2" name="TextBox 1"/>
-          <p:cNvSpPr txBox="1"/>
-          <p:nvPr/>
-        </p:nvSpPr>
-        <p:spPr>
-          <a:xfrm>
-            <a:off x="640000" y="380000"/>
-            <a:ext cx="10912000" cy="420000"/>
-          </a:xfrm>
-          <a:prstGeom prst="rect">
-            <a:avLst/>
-          </a:prstGeom>
-          <a:noFill/>
-        </p:spPr>
-        <p:txBody>
-          <a:bodyPr wrap="square">
-            <a:spAutoFit/>
-          </a:bodyPr>
-          <a:lstStyle/>
-          <a:p>
-            <a:pPr>
-              <a:spcAft>
-                <a:spcPts val="630"/>
-              </a:spcAft>
-            </a:pPr>
-            <a:r>
-              <a:rPr sz="1400" b="1">
-                <a:solidFill>
-                  <a:srgbClr val="E8793A"/>
-                </a:solidFill>
-                <a:latin typeface="Nunito Sans"/>
-              </a:rPr>
-              <a:t>LO DE HOY EN TRES LÍNEAS</a:t>
-            </a:r>
-          </a:p>
-        </p:txBody>
-      </p:sp>
-      <p:sp>
-        <p:nvSpPr>
-          <p:cNvPr id="3" name="TextBox 2"/>
-          <p:cNvSpPr txBox="1"/>
-          <p:nvPr/>
-        </p:nvSpPr>
-        <p:spPr>
-          <a:xfrm>
-            <a:off x="640000" y="1300000"/>
-            <a:ext cx="10912000" cy="4800000"/>
-          </a:xfrm>
-          <a:prstGeom prst="rect">
-            <a:avLst/>
-          </a:prstGeom>
-          <a:noFill/>
-        </p:spPr>
-        <p:txBody>
-          <a:bodyPr wrap="square">
-            <a:spAutoFit/>
-          </a:bodyPr>
-          <a:lstStyle/>
-          <a:p>
-            <a:pPr>
-              <a:spcAft>
-                <a:spcPts val="1350"/>
-              </a:spcAft>
-            </a:pPr>
-            <a:r>
-              <a:rPr sz="3000" b="1">
-                <a:solidFill>
-                  <a:srgbClr val="E8793A"/>
-                </a:solidFill>
-                <a:latin typeface="Nunito Sans"/>
-              </a:rPr>
-              <a:t>1. </a:t>
-            </a:r>
-            <a:r>
-              <a:rPr sz="3000" b="0">
-                <a:solidFill>
-                  <a:srgbClr val="1F2A44"/>
-                </a:solidFill>
-                <a:latin typeface="Nunito Sans"/>
-              </a:rPr>
-              <a:t>Un ejemplo apoya una idea, pero muchos ejemplos no demuestran un «todos».</a:t>
-            </a:r>
-          </a:p>
-          <a:p>
-            <a:pPr>
-              <a:spcAft>
-                <a:spcPts val="1350"/>
-              </a:spcAft>
-            </a:pPr>
-            <a:r>
-              <a:rPr sz="3000" b="1">
-                <a:solidFill>
-                  <a:srgbClr val="E8793A"/>
-                </a:solidFill>
-                <a:latin typeface="Nunito Sans"/>
-              </a:rPr>
-              <a:t>2. </a:t>
-            </a:r>
-            <a:r>
-              <a:rPr sz="3000" b="0">
-                <a:solidFill>
-                  <a:srgbClr val="1F2A44"/>
-                </a:solidFill>
-                <a:latin typeface="Nunito Sans"/>
-              </a:rPr>
-              <a:t>Un contraejemplo basta para tumbar un «todos», un «nadie» o un «nunca».</a:t>
-            </a:r>
-          </a:p>
-          <a:p>
-            <a:pPr>
-              <a:spcAft>
-                <a:spcPts val="1350"/>
-              </a:spcAft>
-            </a:pPr>
-            <a:r>
-              <a:rPr sz="3000" b="1">
-                <a:solidFill>
-                  <a:srgbClr val="E8793A"/>
-                </a:solidFill>
-                <a:latin typeface="Nunito Sans"/>
-              </a:rPr>
-              <a:t>3. </a:t>
-            </a:r>
-            <a:r>
-              <a:rPr sz="3000" b="0">
-                <a:solidFill>
-                  <a:srgbClr val="1F2A44"/>
-                </a:solidFill>
-                <a:latin typeface="Nunito Sans"/>
-              </a:rPr>
-              <a:t>Una analogía es buena si las dos cosas se parecen en lo que importa.</a:t>
-            </a:r>
-          </a:p>
-        </p:txBody>
-      </p:sp>
-    </p:spTree>
-  </p:cSld>
-  <p:clrMapOvr>
-    <a:masterClrMapping/>
-  </p:clrMapOvr>
-</p:sld>
-</file>
-
-<file path=ppt/slides/slide18.xml><?xml version="1.0" encoding="utf-8"?>
-<p:sld xmlns:a="http://schemas.openxmlformats.org/drawingml/2006/main" xmlns:p="http://schemas.openxmlformats.org/presentationml/2006/main" xmlns:r="http://schemas.openxmlformats.org/officeDocument/2006/relationships">
-  <p:cSld>
-    <p:bg>
-      <p:bgPr>
-        <a:solidFill>
-          <a:srgbClr val="1F2A44"/>
-        </a:solidFill>
-        <a:effectLst/>
-      </p:bgPr>
-    </p:bg>
-    <p:spTree>
-      <p:nvGrpSpPr>
-        <p:cNvPr id="1" name=""/>
-        <p:cNvGrpSpPr/>
-        <p:nvPr/>
-      </p:nvGrpSpPr>
-      <p:grpSpPr/>
-      <p:sp>
-        <p:nvSpPr>
-          <p:cNvPr id="2" name="TextBox 1"/>
-          <p:cNvSpPr txBox="1"/>
-          <p:nvPr/>
-        </p:nvSpPr>
-        <p:spPr>
-          <a:xfrm>
-            <a:off x="640000" y="380000"/>
-            <a:ext cx="10912000" cy="420000"/>
-          </a:xfrm>
-          <a:prstGeom prst="rect">
-            <a:avLst/>
-          </a:prstGeom>
-          <a:noFill/>
-        </p:spPr>
-        <p:txBody>
-          <a:bodyPr wrap="square">
-            <a:spAutoFit/>
-          </a:bodyPr>
-          <a:lstStyle/>
-          <a:p>
-            <a:pPr>
-              <a:spcAft>
-                <a:spcPts val="630"/>
-              </a:spcAft>
-            </a:pPr>
-            <a:r>
-              <a:rPr sz="1400" b="1">
-                <a:solidFill>
-                  <a:srgbClr val="F4B183"/>
-                </a:solidFill>
-                <a:latin typeface="Nunito Sans"/>
-              </a:rPr>
-              <a:t>VÍDEO</a:t>
-            </a:r>
-          </a:p>
-        </p:txBody>
-      </p:sp>
-      <p:sp>
-        <p:nvSpPr>
-          <p:cNvPr id="3" name="TextBox 2"/>
-          <p:cNvSpPr txBox="1"/>
-          <p:nvPr/>
-        </p:nvSpPr>
-        <p:spPr>
-          <a:xfrm>
-            <a:off x="640000" y="760000"/>
-            <a:ext cx="10912000" cy="800000"/>
-          </a:xfrm>
-          <a:prstGeom prst="rect">
-            <a:avLst/>
-          </a:prstGeom>
-          <a:noFill/>
-        </p:spPr>
-        <p:txBody>
-          <a:bodyPr wrap="square">
-            <a:spAutoFit/>
-          </a:bodyPr>
-          <a:lstStyle/>
-          <a:p>
-            <a:pPr>
-              <a:spcAft>
-                <a:spcPts val="1620"/>
-              </a:spcAft>
-            </a:pPr>
-            <a:r>
-              <a:rPr sz="3600" b="1">
-                <a:solidFill>
-                  <a:srgbClr val="FBF7EF"/>
-                </a:solidFill>
-                <a:latin typeface="Fredoka"/>
-              </a:rPr>
-              <a:t>Qué es un contraejemplo y qué es un argumento por analogía</a:t>
-            </a:r>
-          </a:p>
-        </p:txBody>
-      </p:sp>
-      <p:sp>
-        <p:nvSpPr>
-          <p:cNvPr id="4" name="TextBox 3"/>
-          <p:cNvSpPr txBox="1"/>
-          <p:nvPr/>
-        </p:nvSpPr>
-        <p:spPr>
-          <a:xfrm>
-            <a:off x="640000" y="2200000"/>
-            <a:ext cx="10912000" cy="2000000"/>
-          </a:xfrm>
-          <a:prstGeom prst="rect">
-            <a:avLst/>
-          </a:prstGeom>
-          <a:noFill/>
-        </p:spPr>
-        <p:txBody>
-          <a:bodyPr wrap="square">
-            <a:spAutoFit/>
-          </a:bodyPr>
-          <a:lstStyle/>
-          <a:p>
-            <a:pPr>
-              <a:spcAft>
-                <a:spcPts val="1080"/>
-              </a:spcAft>
-            </a:pPr>
-            <a:r>
-              <a:rPr sz="2400" b="0">
-                <a:solidFill>
-                  <a:srgbClr val="C9D3E6"/>
-                </a:solidFill>
-                <a:latin typeface="Nunito Sans"/>
-              </a:rPr>
-              <a:t>Ver más casos en los que un solo ejemplo en contra tumba una frase general.</a:t>
-            </a:r>
-          </a:p>
-        </p:txBody>
-      </p:sp>
-    </p:spTree>
-  </p:cSld>
-  <p:clrMapOvr>
-    <a:masterClrMapping/>
-  </p:clrMapOvr>
-</p:sld>
-</file>
-
-<file path=ppt/slides/slide19.xml><?xml version="1.0" encoding="utf-8"?>
-<p:sld xmlns:a="http://schemas.openxmlformats.org/drawingml/2006/main" xmlns:p="http://schemas.openxmlformats.org/presentationml/2006/main" xmlns:r="http://schemas.openxmlformats.org/officeDocument/2006/relationships">
-  <p:cSld>
-    <p:bg>
-      <p:bgPr>
-        <a:solidFill>
-          <a:srgbClr val="1F2A44"/>
-        </a:solidFill>
-        <a:effectLst/>
-      </p:bgPr>
-    </p:bg>
-    <p:spTree>
-      <p:nvGrpSpPr>
-        <p:cNvPr id="1" name=""/>
-        <p:cNvGrpSpPr/>
-        <p:nvPr/>
-      </p:nvGrpSpPr>
-      <p:grpSpPr/>
-      <p:sp>
-        <p:nvSpPr>
-          <p:cNvPr id="2" name="TextBox 1"/>
-          <p:cNvSpPr txBox="1"/>
-          <p:nvPr/>
-        </p:nvSpPr>
-        <p:spPr>
-          <a:xfrm>
-            <a:off x="640000" y="380000"/>
-            <a:ext cx="10912000" cy="420000"/>
-          </a:xfrm>
-          <a:prstGeom prst="rect">
-            <a:avLst/>
-          </a:prstGeom>
-          <a:noFill/>
-        </p:spPr>
-        <p:txBody>
-          <a:bodyPr wrap="square">
-            <a:spAutoFit/>
-          </a:bodyPr>
-          <a:lstStyle/>
-          <a:p>
-            <a:pPr>
-              <a:spcAft>
-                <a:spcPts val="630"/>
-              </a:spcAft>
-            </a:pPr>
-            <a:r>
-              <a:rPr sz="1400" b="1">
-                <a:solidFill>
-                  <a:srgbClr val="F4B183"/>
-                </a:solidFill>
-                <a:latin typeface="Nunito Sans"/>
-              </a:rPr>
-              <a:t>AHORA, LA HOJA DEL DÍA</a:t>
-            </a:r>
-          </a:p>
-        </p:txBody>
-      </p:sp>
-      <p:sp>
-        <p:nvSpPr>
-          <p:cNvPr id="3" name="TextBox 2"/>
-          <p:cNvSpPr txBox="1"/>
-          <p:nvPr/>
-        </p:nvSpPr>
-        <p:spPr>
-          <a:xfrm>
-            <a:off x="640000" y="760000"/>
-            <a:ext cx="10912000" cy="800000"/>
-          </a:xfrm>
-          <a:prstGeom prst="rect">
-            <a:avLst/>
-          </a:prstGeom>
-          <a:noFill/>
-        </p:spPr>
-        <p:txBody>
-          <a:bodyPr wrap="square">
-            <a:spAutoFit/>
-          </a:bodyPr>
-          <a:lstStyle/>
-          <a:p>
-            <a:pPr>
-              <a:spcAft>
-                <a:spcPts val="1710"/>
-              </a:spcAft>
-            </a:pPr>
-            <a:r>
-              <a:rPr sz="3800" b="1">
-                <a:solidFill>
-                  <a:srgbClr val="FBF7EF"/>
-                </a:solidFill>
-                <a:latin typeface="Fredoka"/>
-              </a:rPr>
-              <a:t>20 minutos · individual · en silencio</a:t>
-            </a:r>
-          </a:p>
-        </p:txBody>
-      </p:sp>
-      <p:sp>
-        <p:nvSpPr>
-          <p:cNvPr id="4" name="Rectangle 3"/>
+              <a:t>6 puntos</a:t>
+            </a:r>
+          </a:p>
+        </p:txBody>
+      </p:sp>
+      <p:sp>
+        <p:nvSpPr>
+          <p:cNvPr id="7" name="Rectangle 6"/>
           <p:cNvSpPr/>
           <p:nvPr/>
         </p:nvSpPr>
         <p:spPr>
           <a:xfrm>
-            <a:off x="640000" y="2000000"/>
+            <a:off x="4344000" y="2000000"/>
             <a:ext cx="3504000" cy="1800000"/>
           </a:xfrm>
           <a:prstGeom prst="rect">
@@ -5957,13 +5224,13 @@
       </p:sp>
       <p:sp>
         <p:nvSpPr>
-          <p:cNvPr id="5" name="TextBox 4"/>
+          <p:cNvPr id="8" name="TextBox 7"/>
           <p:cNvSpPr txBox="1"/>
           <p:nvPr/>
         </p:nvSpPr>
         <p:spPr>
           <a:xfrm>
-            <a:off x="790000" y="2100000"/>
+            <a:off x="4494000" y="2100000"/>
             <a:ext cx="3204000" cy="700000"/>
           </a:xfrm>
           <a:prstGeom prst="rect">
@@ -5989,20 +5256,20 @@
                 </a:solidFill>
                 <a:latin typeface="Nunito Sans"/>
               </a:rPr>
-              <a:t>Peldaño 1 · Todos</a:t>
-            </a:r>
-          </a:p>
-        </p:txBody>
-      </p:sp>
-      <p:sp>
-        <p:nvSpPr>
-          <p:cNvPr id="6" name="TextBox 5"/>
+              <a:t>Peldaño 2 · Repaso</a:t>
+            </a:r>
+          </a:p>
+        </p:txBody>
+      </p:sp>
+      <p:sp>
+        <p:nvSpPr>
+          <p:cNvPr id="9" name="TextBox 8"/>
           <p:cNvSpPr txBox="1"/>
           <p:nvPr/>
         </p:nvSpPr>
         <p:spPr>
           <a:xfrm>
-            <a:off x="790000" y="2900000"/>
+            <a:off x="4494000" y="2900000"/>
             <a:ext cx="3204000" cy="700000"/>
           </a:xfrm>
           <a:prstGeom prst="rect">
@@ -6028,20 +5295,20 @@
                 </a:solidFill>
                 <a:latin typeface="Nunito Sans"/>
               </a:rPr>
-              <a:t>6 puntos</a:t>
-            </a:r>
-          </a:p>
-        </p:txBody>
-      </p:sp>
-      <p:sp>
-        <p:nvSpPr>
-          <p:cNvPr id="7" name="Rectangle 6"/>
+              <a:t>2 puntos</a:t>
+            </a:r>
+          </a:p>
+        </p:txBody>
+      </p:sp>
+      <p:sp>
+        <p:nvSpPr>
+          <p:cNvPr id="10" name="Rectangle 9"/>
           <p:cNvSpPr/>
           <p:nvPr/>
         </p:nvSpPr>
         <p:spPr>
           <a:xfrm>
-            <a:off x="4344000" y="2000000"/>
+            <a:off x="8048000" y="2000000"/>
             <a:ext cx="3504000" cy="1800000"/>
           </a:xfrm>
           <a:prstGeom prst="rect">
@@ -6078,13 +5345,13 @@
       </p:sp>
       <p:sp>
         <p:nvSpPr>
-          <p:cNvPr id="8" name="TextBox 7"/>
+          <p:cNvPr id="11" name="TextBox 10"/>
           <p:cNvSpPr txBox="1"/>
           <p:nvPr/>
         </p:nvSpPr>
         <p:spPr>
           <a:xfrm>
-            <a:off x="4494000" y="2100000"/>
+            <a:off x="8198000" y="2100000"/>
             <a:ext cx="3204000" cy="700000"/>
           </a:xfrm>
           <a:prstGeom prst="rect">
@@ -6110,20 +5377,20 @@
                 </a:solidFill>
                 <a:latin typeface="Nunito Sans"/>
               </a:rPr>
-              <a:t>Peldaño 2 · Repaso</a:t>
-            </a:r>
-          </a:p>
-        </p:txBody>
-      </p:sp>
-      <p:sp>
-        <p:nvSpPr>
-          <p:cNvPr id="9" name="TextBox 8"/>
+              <a:t>Peldaño 3 · Reto</a:t>
+            </a:r>
+          </a:p>
+        </p:txBody>
+      </p:sp>
+      <p:sp>
+        <p:nvSpPr>
+          <p:cNvPr id="12" name="TextBox 11"/>
           <p:cNvSpPr txBox="1"/>
           <p:nvPr/>
         </p:nvSpPr>
         <p:spPr>
           <a:xfrm>
-            <a:off x="4494000" y="2900000"/>
+            <a:off x="8198000" y="2900000"/>
             <a:ext cx="3204000" cy="700000"/>
           </a:xfrm>
           <a:prstGeom prst="rect">
@@ -6156,57 +5423,14 @@
       </p:sp>
       <p:sp>
         <p:nvSpPr>
-          <p:cNvPr id="10" name="Rectangle 9"/>
-          <p:cNvSpPr/>
-          <p:nvPr/>
-        </p:nvSpPr>
-        <p:spPr>
-          <a:xfrm>
-            <a:off x="8048000" y="2000000"/>
-            <a:ext cx="3504000" cy="1800000"/>
-          </a:xfrm>
-          <a:prstGeom prst="rect">
-            <a:avLst/>
-          </a:prstGeom>
-          <a:solidFill>
-            <a:srgbClr val="FBF7EF"/>
-          </a:solidFill>
-          <a:ln>
-            <a:noFill/>
-          </a:ln>
-        </p:spPr>
-        <p:style>
-          <a:lnRef idx="1">
-            <a:schemeClr val="accent1"/>
-          </a:lnRef>
-          <a:fillRef idx="3">
-            <a:schemeClr val="accent1"/>
-          </a:fillRef>
-          <a:effectRef idx="2">
-            <a:schemeClr val="accent1"/>
-          </a:effectRef>
-          <a:fontRef idx="minor">
-            <a:schemeClr val="lt1"/>
-          </a:fontRef>
-        </p:style>
-        <p:txBody>
-          <a:bodyPr rtlCol="0" anchor="ctr"/>
-          <a:lstStyle/>
-          <a:p>
-            <a:pPr algn="ctr"/>
-          </a:p>
-        </p:txBody>
-      </p:sp>
-      <p:sp>
-        <p:nvSpPr>
-          <p:cNvPr id="11" name="TextBox 10"/>
+          <p:cNvPr id="13" name="TextBox 12"/>
           <p:cNvSpPr txBox="1"/>
           <p:nvPr/>
         </p:nvSpPr>
         <p:spPr>
           <a:xfrm>
-            <a:off x="8198000" y="2100000"/>
-            <a:ext cx="3204000" cy="700000"/>
+            <a:off x="640000" y="4200000"/>
+            <a:ext cx="10912000" cy="1500000"/>
           </a:xfrm>
           <a:prstGeom prst="rect">
             <a:avLst/>
@@ -6225,91 +5449,13 @@
               </a:spcAft>
             </a:pPr>
             <a:r>
-              <a:rPr sz="2200" b="1">
-                <a:solidFill>
-                  <a:srgbClr val="E8793A"/>
+              <a:rPr sz="2200" b="0">
+                <a:solidFill>
+                  <a:srgbClr val="C9D3E6"/>
                 </a:solidFill>
                 <a:latin typeface="Nunito Sans"/>
               </a:rPr>
-              <a:t>Peldaño 3 · Reto</a:t>
-            </a:r>
-          </a:p>
-        </p:txBody>
-      </p:sp>
-      <p:sp>
-        <p:nvSpPr>
-          <p:cNvPr id="12" name="TextBox 11"/>
-          <p:cNvSpPr txBox="1"/>
-          <p:nvPr/>
-        </p:nvSpPr>
-        <p:spPr>
-          <a:xfrm>
-            <a:off x="8198000" y="2900000"/>
-            <a:ext cx="3204000" cy="700000"/>
-          </a:xfrm>
-          <a:prstGeom prst="rect">
-            <a:avLst/>
-          </a:prstGeom>
-          <a:noFill/>
-        </p:spPr>
-        <p:txBody>
-          <a:bodyPr wrap="square">
-            <a:spAutoFit/>
-          </a:bodyPr>
-          <a:lstStyle/>
-          <a:p>
-            <a:pPr>
-              <a:spcAft>
-                <a:spcPts val="900"/>
-              </a:spcAft>
-            </a:pPr>
-            <a:r>
-              <a:rPr sz="2000" b="0">
-                <a:solidFill>
-                  <a:srgbClr val="4A5568"/>
-                </a:solidFill>
-                <a:latin typeface="Nunito Sans"/>
-              </a:rPr>
-              <a:t>2 puntos</a:t>
-            </a:r>
-          </a:p>
-        </p:txBody>
-      </p:sp>
-      <p:sp>
-        <p:nvSpPr>
-          <p:cNvPr id="13" name="TextBox 12"/>
-          <p:cNvSpPr txBox="1"/>
-          <p:nvPr/>
-        </p:nvSpPr>
-        <p:spPr>
-          <a:xfrm>
-            <a:off x="640000" y="4200000"/>
-            <a:ext cx="10912000" cy="1500000"/>
-          </a:xfrm>
-          <a:prstGeom prst="rect">
-            <a:avLst/>
-          </a:prstGeom>
-          <a:noFill/>
-        </p:spPr>
-        <p:txBody>
-          <a:bodyPr wrap="square">
-            <a:spAutoFit/>
-          </a:bodyPr>
-          <a:lstStyle/>
-          <a:p>
-            <a:pPr>
-              <a:spcAft>
-                <a:spcPts val="990"/>
-              </a:spcAft>
-            </a:pPr>
-            <a:r>
-              <a:rPr sz="2200" b="0">
-                <a:solidFill>
-                  <a:srgbClr val="C9D3E6"/>
-                </a:solidFill>
-                <a:latin typeface="Nunito Sans"/>
-              </a:rPr>
-              <a:t>1.ª pasada: sin apuntes, con bolígrafo. 2.ª pasada: con los apuntes, en otro color. Marca «seguro» o «dudo» en cada respuesta.</a:t>
+              <a:t>Sin apuntes. Junto a cada respuesta, marca «seguro» o «dudo».</a:t>
             </a:r>
           </a:p>
         </p:txBody>
@@ -6461,7 +5607,7 @@
                 </a:solidFill>
                 <a:latin typeface="Nunito Sans"/>
               </a:rPr>
-              <a:t>Se creía que todos los cisnes eran blancos, hasta que se encontraron cisnes ______ en Australia.  (sesión 10)</a:t>
+              <a:t>En el experimento de las descargas, las descargas eran ______.  (sesión 10)</a:t>
             </a:r>
           </a:p>
           <a:p>
@@ -6486,7 +5632,7 @@
                 </a:solidFill>
                 <a:latin typeface="Nunito Sans"/>
               </a:rPr>
-              <a:t>La conclusión de una inducción es ______, no segura.  (sesión 10)</a:t>
+              <a:t>La ______ es cambiar lo que decimos o hacemos para coincidir con el grupo.  (sesión 10)</a:t>
             </a:r>
           </a:p>
           <a:p>
@@ -6511,7 +5657,7 @@
                 </a:solidFill>
                 <a:latin typeface="Nunito Sans"/>
               </a:rPr>
-              <a:t>En el cuento, todo el palacio ______ sin razón.  (sesión 6)</a:t>
+              <a:t>El poder en un sitio no da ______ en todos los temas: la directora no sabe más de fútbol por su cargo.  (sesión 6)</a:t>
             </a:r>
           </a:p>
         </p:txBody>
@@ -6663,7 +5809,7 @@
                 </a:solidFill>
                 <a:latin typeface="Nunito Sans"/>
               </a:rPr>
-              <a:t>Se creía que todos los cisnes eran blancos, hasta que se encontraron cisnes </a:t>
+              <a:t>En el experimento de las descargas, las descargas eran </a:t>
             </a:r>
             <a:r>
               <a:rPr sz="2600" b="1">
@@ -6672,7 +5818,7 @@
                 </a:solidFill>
                 <a:latin typeface="Nunito Sans"/>
               </a:rPr>
-              <a:t>negros</a:t>
+              <a:t>falsas</a:t>
             </a:r>
             <a:r>
               <a:rPr sz="2600" b="0">
@@ -6681,7 +5827,7 @@
                 </a:solidFill>
                 <a:latin typeface="Nunito Sans"/>
               </a:rPr>
-              <a:t> en Australia.  (sesión 10)</a:t>
+              <a:t>.  (sesión 10)</a:t>
             </a:r>
           </a:p>
           <a:p>
@@ -6706,7 +5852,7 @@
                 </a:solidFill>
                 <a:latin typeface="Nunito Sans"/>
               </a:rPr>
-              <a:t>La conclusión de una inducción es </a:t>
+              <a:t>La </a:t>
             </a:r>
             <a:r>
               <a:rPr sz="2600" b="1">
@@ -6715,7 +5861,7 @@
                 </a:solidFill>
                 <a:latin typeface="Nunito Sans"/>
               </a:rPr>
-              <a:t>probable</a:t>
+              <a:t>conformidad</a:t>
             </a:r>
             <a:r>
               <a:rPr sz="2600" b="0">
@@ -6724,7 +5870,7 @@
                 </a:solidFill>
                 <a:latin typeface="Nunito Sans"/>
               </a:rPr>
-              <a:t>, no segura.  (sesión 10)</a:t>
+              <a:t> es cambiar lo que decimos o hacemos para coincidir con el grupo.  (sesión 10)</a:t>
             </a:r>
           </a:p>
           <a:p>
@@ -6749,7 +5895,7 @@
                 </a:solidFill>
                 <a:latin typeface="Nunito Sans"/>
               </a:rPr>
-              <a:t>En el cuento, todo el palacio </a:t>
+              <a:t>El poder en un sitio no da </a:t>
             </a:r>
             <a:r>
               <a:rPr sz="2600" b="1">
@@ -6758,7 +5904,7 @@
                 </a:solidFill>
                 <a:latin typeface="Nunito Sans"/>
               </a:rPr>
-              <a:t>cojeaba</a:t>
+              <a:t>saber</a:t>
             </a:r>
             <a:r>
               <a:rPr sz="2600" b="0">
@@ -6767,7 +5913,7 @@
                 </a:solidFill>
                 <a:latin typeface="Nunito Sans"/>
               </a:rPr>
-              <a:t> sin razón.  (sesión 6)</a:t>
+              <a:t> en todos los temas: la directora no sabe más de fútbol por su cargo.  (sesión 6)</a:t>
             </a:r>
           </a:p>
         </p:txBody>
@@ -6914,7 +6060,7 @@
                 </a:solidFill>
                 <a:latin typeface="Nunito Sans"/>
               </a:rPr>
-              <a:t>Un chico dice: «Todos los gatos odian el agua». Una chica le enseña un vídeo de su gato nadando tan tranquilo.</a:t>
+              <a:t>Cinco sesiones sobre a quién hacemos caso y por qué.</a:t>
             </a:r>
           </a:p>
         </p:txBody>
@@ -6953,7 +6099,7 @@
                 </a:solidFill>
                 <a:latin typeface="Nunito Sans"/>
               </a:rPr>
-              <a:t>¿Qué le pasa a la frase de ese chico?</a:t>
+              <a:t>¿Qué idea de esta unidad te ha sorprendido más?</a:t>
             </a:r>
           </a:p>
         </p:txBody>
@@ -7057,7 +6203,7 @@
                 </a:solidFill>
                 <a:latin typeface="Fredoka"/>
               </a:rPr>
-              <a:t>Tres herramientas</a:t>
+              <a:t>Repaso de la unidad</a:t>
             </a:r>
           </a:p>
         </p:txBody>
@@ -7122,7 +6268,7 @@
                 </a:solidFill>
                 <a:latin typeface="Nunito Sans"/>
               </a:rPr>
-              <a:t>BLOQUE 1 · TRES HERRAMIENTAS</a:t>
+              <a:t>BLOQUE 1 · REPASO DE LA UNIDAD</a:t>
             </a:r>
           </a:p>
         </p:txBody>
@@ -7161,227 +6307,310 @@
                 </a:solidFill>
                 <a:latin typeface="Fredoka"/>
               </a:rPr>
-              <a:t>Ejemplo</a:t>
-            </a:r>
-          </a:p>
-        </p:txBody>
-      </p:sp>
-      <p:sp>
-        <p:nvSpPr>
-          <p:cNvPr id="4" name="Rectangle 3"/>
-          <p:cNvSpPr/>
+              <a:t>Dos tipos de autoridad (sesión 6)</a:t>
+            </a:r>
+          </a:p>
+        </p:txBody>
+      </p:sp>
+      <p:graphicFrame>
+        <p:nvGraphicFramePr>
+          <p:cNvPr id="4" name="Table 3"/>
+          <p:cNvGraphicFramePr>
+            <a:graphicFrameLocks noGrp="1"/>
+          </p:cNvGraphicFramePr>
           <p:nvPr/>
-        </p:nvSpPr>
-        <p:spPr>
-          <a:xfrm>
-            <a:off x="640000" y="1650000"/>
-            <a:ext cx="10912000" cy="1150000"/>
-          </a:xfrm>
-          <a:prstGeom prst="rect">
-            <a:avLst/>
-          </a:prstGeom>
-          <a:solidFill>
-            <a:srgbClr val="EAF0F7"/>
-          </a:solidFill>
-          <a:ln>
-            <a:noFill/>
-          </a:ln>
-        </p:spPr>
-        <p:style>
-          <a:lnRef idx="1">
-            <a:schemeClr val="accent1"/>
-          </a:lnRef>
-          <a:fillRef idx="3">
-            <a:schemeClr val="accent1"/>
-          </a:fillRef>
-          <a:effectRef idx="2">
-            <a:schemeClr val="accent1"/>
-          </a:effectRef>
-          <a:fontRef idx="minor">
-            <a:schemeClr val="lt1"/>
-          </a:fontRef>
-        </p:style>
-        <p:txBody>
-          <a:bodyPr rtlCol="0" anchor="ctr"/>
-          <a:lstStyle/>
-          <a:p>
-            <a:pPr algn="ctr"/>
-          </a:p>
-        </p:txBody>
-      </p:sp>
-      <p:sp>
-        <p:nvSpPr>
-          <p:cNvPr id="5" name="TextBox 4"/>
-          <p:cNvSpPr txBox="1"/>
-          <p:nvPr/>
-        </p:nvSpPr>
-        <p:spPr>
-          <a:xfrm>
-            <a:off x="840000" y="1730000"/>
-            <a:ext cx="10512000" cy="1000000"/>
-          </a:xfrm>
-          <a:prstGeom prst="rect">
-            <a:avLst/>
-          </a:prstGeom>
-          <a:noFill/>
-        </p:spPr>
-        <p:txBody>
-          <a:bodyPr wrap="square" anchor="ctr">
-            <a:spAutoFit/>
-          </a:bodyPr>
-          <a:lstStyle/>
-          <a:p>
-            <a:pPr>
-              <a:spcAft>
-                <a:spcPts val="1260"/>
-              </a:spcAft>
-            </a:pPr>
-            <a:r>
-              <a:rPr sz="2800" b="1">
-                <a:solidFill>
-                  <a:srgbClr val="1F2A44"/>
-                </a:solidFill>
-                <a:latin typeface="Nunito Sans"/>
-              </a:rPr>
-              <a:t>Un ejemplo es un caso que </a:t>
-            </a:r>
-            <a:r>
-              <a:rPr sz="2800" b="1">
-                <a:solidFill>
-                  <a:srgbClr val="1F2A44"/>
-                </a:solidFill>
-                <a:latin typeface="Nunito Sans"/>
-              </a:rPr>
-              <a:t>ilustra</a:t>
-            </a:r>
-            <a:r>
-              <a:rPr sz="2800" b="1">
-                <a:solidFill>
-                  <a:srgbClr val="1F2A44"/>
-                </a:solidFill>
-                <a:latin typeface="Nunito Sans"/>
-              </a:rPr>
-              <a:t> o </a:t>
-            </a:r>
-            <a:r>
-              <a:rPr sz="2800" b="1">
-                <a:solidFill>
-                  <a:srgbClr val="1F2A44"/>
-                </a:solidFill>
-                <a:latin typeface="Nunito Sans"/>
-              </a:rPr>
-              <a:t>apoya</a:t>
-            </a:r>
-            <a:r>
-              <a:rPr sz="2800" b="1">
-                <a:solidFill>
-                  <a:srgbClr val="1F2A44"/>
-                </a:solidFill>
-                <a:latin typeface="Nunito Sans"/>
-              </a:rPr>
-              <a:t> una idea.</a:t>
-            </a:r>
-          </a:p>
-        </p:txBody>
-      </p:sp>
-      <p:sp>
-        <p:nvSpPr>
-          <p:cNvPr id="6" name="TextBox 5"/>
-          <p:cNvSpPr txBox="1"/>
-          <p:nvPr/>
-        </p:nvSpPr>
-        <p:spPr>
-          <a:xfrm>
-            <a:off x="640000" y="3000000"/>
-            <a:ext cx="10912000" cy="3458000"/>
-          </a:xfrm>
-          <a:prstGeom prst="rect">
-            <a:avLst/>
-          </a:prstGeom>
-          <a:noFill/>
-        </p:spPr>
-        <p:txBody>
-          <a:bodyPr wrap="square">
-            <a:spAutoFit/>
-          </a:bodyPr>
-          <a:lstStyle/>
-          <a:p>
-            <a:pPr>
-              <a:spcAft>
-                <a:spcPts val="1260"/>
-              </a:spcAft>
-            </a:pPr>
-            <a:r>
-              <a:rPr sz="2800" b="1">
-                <a:solidFill>
-                  <a:srgbClr val="E8793A"/>
-                </a:solidFill>
-                <a:latin typeface="Nunito Sans"/>
-              </a:rPr>
-              <a:t>• </a:t>
-            </a:r>
-            <a:r>
-              <a:rPr sz="2800" b="0">
-                <a:solidFill>
-                  <a:srgbClr val="1F2A44"/>
-                </a:solidFill>
-                <a:latin typeface="Nunito Sans"/>
-              </a:rPr>
-              <a:t>Ayuda a entender</a:t>
-            </a:r>
-          </a:p>
-          <a:p>
-            <a:pPr>
-              <a:spcAft>
-                <a:spcPts val="1260"/>
-              </a:spcAft>
-            </a:pPr>
-            <a:r>
-              <a:rPr sz="2800" b="1">
-                <a:solidFill>
-                  <a:srgbClr val="E8793A"/>
-                </a:solidFill>
-                <a:latin typeface="Nunito Sans"/>
-              </a:rPr>
-              <a:t>• </a:t>
-            </a:r>
-            <a:r>
-              <a:rPr sz="2800" b="0">
-                <a:solidFill>
-                  <a:srgbClr val="1F2A44"/>
-                </a:solidFill>
-                <a:latin typeface="Nunito Sans"/>
-              </a:rPr>
-              <a:t>Muchos ejemplos hacen una idea más probable</a:t>
-            </a:r>
-          </a:p>
-          <a:p>
-            <a:pPr>
-              <a:spcAft>
-                <a:spcPts val="1260"/>
-              </a:spcAft>
-            </a:pPr>
-            <a:r>
-              <a:rPr sz="2800" b="1">
-                <a:solidFill>
-                  <a:srgbClr val="E8793A"/>
-                </a:solidFill>
-                <a:latin typeface="Nunito Sans"/>
-              </a:rPr>
-              <a:t>• </a:t>
-            </a:r>
-            <a:r>
-              <a:rPr sz="2800" b="0">
-                <a:solidFill>
-                  <a:srgbClr val="1F2A44"/>
-                </a:solidFill>
-                <a:latin typeface="Nunito Sans"/>
-              </a:rPr>
-              <a:t>Pero no demuestran un «todos» (sesión 10)</a:t>
-            </a:r>
-          </a:p>
-        </p:txBody>
-      </p:sp>
+        </p:nvGraphicFramePr>
+        <p:xfrm>
+          <a:off x="640000" y="1700000"/>
+          <a:ext cx="10912000" cy="2400000"/>
+        </p:xfrm>
+        <a:graphic>
+          <a:graphicData uri="http://schemas.openxmlformats.org/drawingml/2006/table">
+            <a:tbl>
+              <a:tblPr firstRow="1" bandRow="1">
+                <a:tableStyleId>{5C22544A-7EE6-4342-B048-85BDC9FD1C3A}</a:tableStyleId>
+              </a:tblPr>
+              <a:tblGrid>
+                <a:gridCol w="3637333"/>
+                <a:gridCol w="3637333"/>
+                <a:gridCol w="3637334"/>
+              </a:tblGrid>
+              <a:tr h="600000">
+                <a:tc>
+                  <a:txBody>
+                    <a:bodyPr/>
+                    <a:lstStyle/>
+                    <a:p>
+                      <a:r>
+                        <a:rPr sz="2000" b="1">
+                          <a:solidFill>
+                            <a:srgbClr val="FBF7EF"/>
+                          </a:solidFill>
+                          <a:latin typeface="Fredoka"/>
+                        </a:rPr>
+                        <a:t/>
+                      </a:r>
+                    </a:p>
+                  </a:txBody>
+                  <a:tcPr>
+                    <a:solidFill>
+                      <a:srgbClr val="1F2A44"/>
+                    </a:solidFill>
+                  </a:tcPr>
+                </a:tc>
+                <a:tc>
+                  <a:txBody>
+                    <a:bodyPr/>
+                    <a:lstStyle/>
+                    <a:p>
+                      <a:r>
+                        <a:rPr sz="2000" b="1">
+                          <a:solidFill>
+                            <a:srgbClr val="FBF7EF"/>
+                          </a:solidFill>
+                          <a:latin typeface="Fredoka"/>
+                        </a:rPr>
+                        <a:t>Por poder</a:t>
+                      </a:r>
+                    </a:p>
+                  </a:txBody>
+                  <a:tcPr>
+                    <a:solidFill>
+                      <a:srgbClr val="1F2A44"/>
+                    </a:solidFill>
+                  </a:tcPr>
+                </a:tc>
+                <a:tc>
+                  <a:txBody>
+                    <a:bodyPr/>
+                    <a:lstStyle/>
+                    <a:p>
+                      <a:r>
+                        <a:rPr sz="2000" b="1">
+                          <a:solidFill>
+                            <a:srgbClr val="FBF7EF"/>
+                          </a:solidFill>
+                          <a:latin typeface="Fredoka"/>
+                        </a:rPr>
+                        <a:t>Por saber</a:t>
+                      </a:r>
+                    </a:p>
+                  </a:txBody>
+                  <a:tcPr>
+                    <a:solidFill>
+                      <a:srgbClr val="1F2A44"/>
+                    </a:solidFill>
+                  </a:tcPr>
+                </a:tc>
+              </a:tr>
+              <a:tr h="600000">
+                <a:tc>
+                  <a:txBody>
+                    <a:bodyPr/>
+                    <a:lstStyle/>
+                    <a:p>
+                      <a:r>
+                        <a:rPr sz="2000" b="1">
+                          <a:solidFill>
+                            <a:srgbClr val="1F2A44"/>
+                          </a:solidFill>
+                          <a:latin typeface="Nunito Sans"/>
+                        </a:rPr>
+                        <a:t>Qué tiene</a:t>
+                      </a:r>
+                    </a:p>
+                  </a:txBody>
+                  <a:tcPr>
+                    <a:solidFill>
+                      <a:srgbClr val="FFFFFF"/>
+                    </a:solidFill>
+                  </a:tcPr>
+                </a:tc>
+                <a:tc>
+                  <a:txBody>
+                    <a:bodyPr/>
+                    <a:lstStyle/>
+                    <a:p>
+                      <a:r>
+                        <a:rPr sz="2000" b="0">
+                          <a:solidFill>
+                            <a:srgbClr val="1F2A44"/>
+                          </a:solidFill>
+                          <a:latin typeface="Nunito Sans"/>
+                        </a:rPr>
+                        <a:t>Un cargo: puede mandar</a:t>
+                      </a:r>
+                    </a:p>
+                  </a:txBody>
+                  <a:tcPr>
+                    <a:solidFill>
+                      <a:srgbClr val="FFFFFF"/>
+                    </a:solidFill>
+                  </a:tcPr>
+                </a:tc>
+                <a:tc>
+                  <a:txBody>
+                    <a:bodyPr/>
+                    <a:lstStyle/>
+                    <a:p>
+                      <a:r>
+                        <a:rPr sz="2000" b="0">
+                          <a:solidFill>
+                            <a:srgbClr val="1F2A44"/>
+                          </a:solidFill>
+                          <a:latin typeface="Nunito Sans"/>
+                        </a:rPr>
+                        <a:t>Conocimiento de un tema</a:t>
+                      </a:r>
+                    </a:p>
+                  </a:txBody>
+                  <a:tcPr>
+                    <a:solidFill>
+                      <a:srgbClr val="FFFFFF"/>
+                    </a:solidFill>
+                  </a:tcPr>
+                </a:tc>
+              </a:tr>
+              <a:tr h="600000">
+                <a:tc>
+                  <a:txBody>
+                    <a:bodyPr/>
+                    <a:lstStyle/>
+                    <a:p>
+                      <a:r>
+                        <a:rPr sz="2000" b="1">
+                          <a:solidFill>
+                            <a:srgbClr val="1F2A44"/>
+                          </a:solidFill>
+                          <a:latin typeface="Nunito Sans"/>
+                        </a:rPr>
+                        <a:t>Qué me pide</a:t>
+                      </a:r>
+                    </a:p>
+                  </a:txBody>
+                  <a:tcPr>
+                    <a:solidFill>
+                      <a:srgbClr val="EAF0F7"/>
+                    </a:solidFill>
+                  </a:tcPr>
+                </a:tc>
+                <a:tc>
+                  <a:txBody>
+                    <a:bodyPr/>
+                    <a:lstStyle/>
+                    <a:p>
+                      <a:r>
+                        <a:rPr sz="2000" b="0">
+                          <a:solidFill>
+                            <a:srgbClr val="1F2A44"/>
+                          </a:solidFill>
+                          <a:latin typeface="Nunito Sans"/>
+                        </a:rPr>
+                        <a:t>Que obedezca</a:t>
+                      </a:r>
+                    </a:p>
+                  </a:txBody>
+                  <a:tcPr>
+                    <a:solidFill>
+                      <a:srgbClr val="EAF0F7"/>
+                    </a:solidFill>
+                  </a:tcPr>
+                </a:tc>
+                <a:tc>
+                  <a:txBody>
+                    <a:bodyPr/>
+                    <a:lstStyle/>
+                    <a:p>
+                      <a:r>
+                        <a:rPr sz="2000" b="0">
+                          <a:solidFill>
+                            <a:srgbClr val="1F2A44"/>
+                          </a:solidFill>
+                          <a:latin typeface="Nunito Sans"/>
+                        </a:rPr>
+                        <a:t>Que me crea lo que dice</a:t>
+                      </a:r>
+                    </a:p>
+                  </a:txBody>
+                  <a:tcPr>
+                    <a:solidFill>
+                      <a:srgbClr val="EAF0F7"/>
+                    </a:solidFill>
+                  </a:tcPr>
+                </a:tc>
+              </a:tr>
+              <a:tr h="600000">
+                <a:tc>
+                  <a:txBody>
+                    <a:bodyPr/>
+                    <a:lstStyle/>
+                    <a:p>
+                      <a:r>
+                        <a:rPr sz="2000" b="1">
+                          <a:solidFill>
+                            <a:srgbClr val="1F2A44"/>
+                          </a:solidFill>
+                          <a:latin typeface="Nunito Sans"/>
+                        </a:rPr>
+                        <a:t>Ejemplo</a:t>
+                      </a:r>
+                    </a:p>
+                  </a:txBody>
+                  <a:tcPr>
+                    <a:solidFill>
+                      <a:srgbClr val="FFFFFF"/>
+                    </a:solidFill>
+                  </a:tcPr>
+                </a:tc>
+                <a:tc>
+                  <a:txBody>
+                    <a:bodyPr/>
+                    <a:lstStyle/>
+                    <a:p>
+                      <a:r>
+                        <a:rPr sz="2000" b="0">
+                          <a:solidFill>
+                            <a:srgbClr val="1F2A44"/>
+                          </a:solidFill>
+                          <a:latin typeface="Nunito Sans"/>
+                        </a:rPr>
+                        <a:t>El árbitro</a:t>
+                      </a:r>
+                    </a:p>
+                  </a:txBody>
+                  <a:tcPr>
+                    <a:solidFill>
+                      <a:srgbClr val="FFFFFF"/>
+                    </a:solidFill>
+                  </a:tcPr>
+                </a:tc>
+                <a:tc>
+                  <a:txBody>
+                    <a:bodyPr/>
+                    <a:lstStyle/>
+                    <a:p>
+                      <a:r>
+                        <a:rPr sz="2000" b="0">
+                          <a:solidFill>
+                            <a:srgbClr val="1F2A44"/>
+                          </a:solidFill>
+                          <a:latin typeface="Nunito Sans"/>
+                        </a:rPr>
+                        <a:t>La mecánica</a:t>
+                      </a:r>
+                    </a:p>
+                  </a:txBody>
+                  <a:tcPr>
+                    <a:solidFill>
+                      <a:srgbClr val="FFFFFF"/>
+                    </a:solidFill>
+                  </a:tcPr>
+                </a:tc>
+              </a:tr>
+            </a:tbl>
+          </a:graphicData>
+        </a:graphic>
+      </p:graphicFrame>
     </p:spTree>
   </p:cSld>
   <p:clrMapOvr>
@@ -7442,7 +6671,7 @@
                 </a:solidFill>
                 <a:latin typeface="Nunito Sans"/>
               </a:rPr>
-              <a:t>BLOQUE 1 · TRES HERRAMIENTAS</a:t>
+              <a:t>BLOQUE 1 · REPASO DE LA UNIDAD</a:t>
             </a:r>
           </a:p>
         </p:txBody>
@@ -7481,218 +6710,267 @@
                 </a:solidFill>
                 <a:latin typeface="Fredoka"/>
               </a:rPr>
-              <a:t>Contraejemplo</a:t>
-            </a:r>
-          </a:p>
-        </p:txBody>
-      </p:sp>
-      <p:sp>
-        <p:nvSpPr>
-          <p:cNvPr id="4" name="Rectangle 3"/>
-          <p:cNvSpPr/>
+              <a:t>Cuatro preguntas a un experto (sesión 7)</a:t>
+            </a:r>
+          </a:p>
+        </p:txBody>
+      </p:sp>
+      <p:graphicFrame>
+        <p:nvGraphicFramePr>
+          <p:cNvPr id="4" name="Table 3"/>
+          <p:cNvGraphicFramePr>
+            <a:graphicFrameLocks noGrp="1"/>
+          </p:cNvGraphicFramePr>
           <p:nvPr/>
-        </p:nvSpPr>
-        <p:spPr>
-          <a:xfrm>
-            <a:off x="640000" y="1650000"/>
-            <a:ext cx="10912000" cy="1150000"/>
-          </a:xfrm>
-          <a:prstGeom prst="rect">
-            <a:avLst/>
-          </a:prstGeom>
-          <a:solidFill>
-            <a:srgbClr val="EAF0F7"/>
-          </a:solidFill>
-          <a:ln>
-            <a:noFill/>
-          </a:ln>
-        </p:spPr>
-        <p:style>
-          <a:lnRef idx="1">
-            <a:schemeClr val="accent1"/>
-          </a:lnRef>
-          <a:fillRef idx="3">
-            <a:schemeClr val="accent1"/>
-          </a:fillRef>
-          <a:effectRef idx="2">
-            <a:schemeClr val="accent1"/>
-          </a:effectRef>
-          <a:fontRef idx="minor">
-            <a:schemeClr val="lt1"/>
-          </a:fontRef>
-        </p:style>
-        <p:txBody>
-          <a:bodyPr rtlCol="0" anchor="ctr"/>
-          <a:lstStyle/>
-          <a:p>
-            <a:pPr algn="ctr"/>
-          </a:p>
-        </p:txBody>
-      </p:sp>
-      <p:sp>
-        <p:nvSpPr>
-          <p:cNvPr id="5" name="TextBox 4"/>
-          <p:cNvSpPr txBox="1"/>
-          <p:nvPr/>
-        </p:nvSpPr>
-        <p:spPr>
-          <a:xfrm>
-            <a:off x="840000" y="1730000"/>
-            <a:ext cx="10512000" cy="1000000"/>
-          </a:xfrm>
-          <a:prstGeom prst="rect">
-            <a:avLst/>
-          </a:prstGeom>
-          <a:noFill/>
-        </p:spPr>
-        <p:txBody>
-          <a:bodyPr wrap="square" anchor="ctr">
-            <a:spAutoFit/>
-          </a:bodyPr>
-          <a:lstStyle/>
-          <a:p>
-            <a:pPr>
-              <a:spcAft>
-                <a:spcPts val="1260"/>
-              </a:spcAft>
-            </a:pPr>
-            <a:r>
-              <a:rPr sz="2800" b="1">
-                <a:solidFill>
-                  <a:srgbClr val="1F2A44"/>
-                </a:solidFill>
-                <a:latin typeface="Nunito Sans"/>
-              </a:rPr>
-              <a:t>Un contraejemplo es un caso que va </a:t>
-            </a:r>
-            <a:r>
-              <a:rPr sz="2800" b="1">
-                <a:solidFill>
-                  <a:srgbClr val="1F2A44"/>
-                </a:solidFill>
-                <a:latin typeface="Nunito Sans"/>
-              </a:rPr>
-              <a:t>en contra</a:t>
-            </a:r>
-            <a:r>
-              <a:rPr sz="2800" b="1">
-                <a:solidFill>
-                  <a:srgbClr val="1F2A44"/>
-                </a:solidFill>
-                <a:latin typeface="Nunito Sans"/>
-              </a:rPr>
-              <a:t> de una afirmación general.</a:t>
-            </a:r>
-          </a:p>
-        </p:txBody>
-      </p:sp>
-      <p:sp>
-        <p:nvSpPr>
-          <p:cNvPr id="6" name="TextBox 5"/>
-          <p:cNvSpPr txBox="1"/>
-          <p:nvPr/>
-        </p:nvSpPr>
-        <p:spPr>
-          <a:xfrm>
-            <a:off x="640000" y="3000000"/>
-            <a:ext cx="10912000" cy="3458000"/>
-          </a:xfrm>
-          <a:prstGeom prst="rect">
-            <a:avLst/>
-          </a:prstGeom>
-          <a:noFill/>
-        </p:spPr>
-        <p:txBody>
-          <a:bodyPr wrap="square">
-            <a:spAutoFit/>
-          </a:bodyPr>
-          <a:lstStyle/>
-          <a:p>
-            <a:pPr>
-              <a:spcAft>
-                <a:spcPts val="1260"/>
-              </a:spcAft>
-            </a:pPr>
-            <a:r>
-              <a:rPr sz="2800" b="1">
-                <a:solidFill>
-                  <a:srgbClr val="E8793A"/>
-                </a:solidFill>
-                <a:latin typeface="Nunito Sans"/>
-              </a:rPr>
-              <a:t>• </a:t>
-            </a:r>
-            <a:r>
-              <a:rPr sz="2800" b="0">
-                <a:solidFill>
-                  <a:srgbClr val="1F2A44"/>
-                </a:solidFill>
-                <a:latin typeface="Nunito Sans"/>
-              </a:rPr>
-              <a:t>Tumba frases con «todos», «nadie», «siempre», «nunca»</a:t>
-            </a:r>
-          </a:p>
-          <a:p>
-            <a:pPr>
-              <a:spcAft>
-                <a:spcPts val="1260"/>
-              </a:spcAft>
-            </a:pPr>
-            <a:r>
-              <a:rPr sz="2800" b="1">
-                <a:solidFill>
-                  <a:srgbClr val="E8793A"/>
-                </a:solidFill>
-                <a:latin typeface="Nunito Sans"/>
-              </a:rPr>
-              <a:t>• </a:t>
-            </a:r>
-            <a:r>
-              <a:rPr sz="2800" b="1">
-                <a:solidFill>
-                  <a:srgbClr val="1F2A44"/>
-                </a:solidFill>
-                <a:latin typeface="Nunito Sans"/>
-              </a:rPr>
-              <a:t>Basta uno</a:t>
-            </a:r>
-            <a:r>
-              <a:rPr sz="2800" b="0">
-                <a:solidFill>
-                  <a:srgbClr val="1F2A44"/>
-                </a:solidFill>
-                <a:latin typeface="Nunito Sans"/>
-              </a:rPr>
-              <a:t> para tumbar un «todos»</a:t>
-            </a:r>
-          </a:p>
-          <a:p>
-            <a:pPr>
-              <a:spcAft>
-                <a:spcPts val="1260"/>
-              </a:spcAft>
-            </a:pPr>
-            <a:r>
-              <a:rPr sz="2800" b="1">
-                <a:solidFill>
-                  <a:srgbClr val="E8793A"/>
-                </a:solidFill>
-                <a:latin typeface="Nunito Sans"/>
-              </a:rPr>
-              <a:t>• </a:t>
-            </a:r>
-            <a:r>
-              <a:rPr sz="2800" b="0">
-                <a:solidFill>
-                  <a:srgbClr val="1F2A44"/>
-                </a:solidFill>
-                <a:latin typeface="Nunito Sans"/>
-              </a:rPr>
-              <a:t>«Todos los gatos odian el agua» → un gato que nada</a:t>
-            </a:r>
-          </a:p>
-        </p:txBody>
-      </p:sp>
+        </p:nvGraphicFramePr>
+        <p:xfrm>
+          <a:off x="640000" y="1700000"/>
+          <a:ext cx="10912000" cy="3000000"/>
+        </p:xfrm>
+        <a:graphic>
+          <a:graphicData uri="http://schemas.openxmlformats.org/drawingml/2006/table">
+            <a:tbl>
+              <a:tblPr firstRow="1" bandRow="1">
+                <a:tableStyleId>{5C22544A-7EE6-4342-B048-85BDC9FD1C3A}</a:tableStyleId>
+              </a:tblPr>
+              <a:tblGrid>
+                <a:gridCol w="5456000"/>
+                <a:gridCol w="5456000"/>
+              </a:tblGrid>
+              <a:tr h="600000">
+                <a:tc>
+                  <a:txBody>
+                    <a:bodyPr/>
+                    <a:lstStyle/>
+                    <a:p>
+                      <a:r>
+                        <a:rPr sz="2000" b="1">
+                          <a:solidFill>
+                            <a:srgbClr val="FBF7EF"/>
+                          </a:solidFill>
+                          <a:latin typeface="Fredoka"/>
+                        </a:rPr>
+                        <a:t>Mira…</a:t>
+                      </a:r>
+                    </a:p>
+                  </a:txBody>
+                  <a:tcPr>
+                    <a:solidFill>
+                      <a:srgbClr val="1F2A44"/>
+                    </a:solidFill>
+                  </a:tcPr>
+                </a:tc>
+                <a:tc>
+                  <a:txBody>
+                    <a:bodyPr/>
+                    <a:lstStyle/>
+                    <a:p>
+                      <a:r>
+                        <a:rPr sz="2000" b="1">
+                          <a:solidFill>
+                            <a:srgbClr val="FBF7EF"/>
+                          </a:solidFill>
+                          <a:latin typeface="Fredoka"/>
+                        </a:rPr>
+                        <a:t>Pregunta</a:t>
+                      </a:r>
+                    </a:p>
+                  </a:txBody>
+                  <a:tcPr>
+                    <a:solidFill>
+                      <a:srgbClr val="1F2A44"/>
+                    </a:solidFill>
+                  </a:tcPr>
+                </a:tc>
+              </a:tr>
+              <a:tr h="600000">
+                <a:tc>
+                  <a:txBody>
+                    <a:bodyPr/>
+                    <a:lstStyle/>
+                    <a:p>
+                      <a:r>
+                        <a:rPr sz="2000" b="1">
+                          <a:solidFill>
+                            <a:srgbClr val="1F2A44"/>
+                          </a:solidFill>
+                          <a:latin typeface="Nunito Sans"/>
+                        </a:rPr>
+                        <a:t>Su campo</a:t>
+                      </a:r>
+                    </a:p>
+                  </a:txBody>
+                  <a:tcPr>
+                    <a:solidFill>
+                      <a:srgbClr val="FFFFFF"/>
+                    </a:solidFill>
+                  </a:tcPr>
+                </a:tc>
+                <a:tc>
+                  <a:txBody>
+                    <a:bodyPr/>
+                    <a:lstStyle/>
+                    <a:p>
+                      <a:r>
+                        <a:rPr sz="2000" b="0">
+                          <a:solidFill>
+                            <a:srgbClr val="1F2A44"/>
+                          </a:solidFill>
+                          <a:latin typeface="Nunito Sans"/>
+                        </a:rPr>
+                        <a:t>¿Habla de lo que ha estudiado?</a:t>
+                      </a:r>
+                    </a:p>
+                  </a:txBody>
+                  <a:tcPr>
+                    <a:solidFill>
+                      <a:srgbClr val="FFFFFF"/>
+                    </a:solidFill>
+                  </a:tcPr>
+                </a:tc>
+              </a:tr>
+              <a:tr h="600000">
+                <a:tc>
+                  <a:txBody>
+                    <a:bodyPr/>
+                    <a:lstStyle/>
+                    <a:p>
+                      <a:r>
+                        <a:rPr sz="2000" b="1">
+                          <a:solidFill>
+                            <a:srgbClr val="1F2A44"/>
+                          </a:solidFill>
+                          <a:latin typeface="Nunito Sans"/>
+                        </a:rPr>
+                        <a:t>El consenso</a:t>
+                      </a:r>
+                    </a:p>
+                  </a:txBody>
+                  <a:tcPr>
+                    <a:solidFill>
+                      <a:srgbClr val="EAF0F7"/>
+                    </a:solidFill>
+                  </a:tcPr>
+                </a:tc>
+                <a:tc>
+                  <a:txBody>
+                    <a:bodyPr/>
+                    <a:lstStyle/>
+                    <a:p>
+                      <a:r>
+                        <a:rPr sz="2000" b="0">
+                          <a:solidFill>
+                            <a:srgbClr val="1F2A44"/>
+                          </a:solidFill>
+                          <a:latin typeface="Nunito Sans"/>
+                        </a:rPr>
+                        <a:t>¿Qué dicen la mayoría de los expertos?</a:t>
+                      </a:r>
+                    </a:p>
+                  </a:txBody>
+                  <a:tcPr>
+                    <a:solidFill>
+                      <a:srgbClr val="EAF0F7"/>
+                    </a:solidFill>
+                  </a:tcPr>
+                </a:tc>
+              </a:tr>
+              <a:tr h="600000">
+                <a:tc>
+                  <a:txBody>
+                    <a:bodyPr/>
+                    <a:lstStyle/>
+                    <a:p>
+                      <a:r>
+                        <a:rPr sz="2000" b="1">
+                          <a:solidFill>
+                            <a:srgbClr val="1F2A44"/>
+                          </a:solidFill>
+                          <a:latin typeface="Nunito Sans"/>
+                        </a:rPr>
+                        <a:t>Sus intereses</a:t>
+                      </a:r>
+                    </a:p>
+                  </a:txBody>
+                  <a:tcPr>
+                    <a:solidFill>
+                      <a:srgbClr val="FFFFFF"/>
+                    </a:solidFill>
+                  </a:tcPr>
+                </a:tc>
+                <a:tc>
+                  <a:txBody>
+                    <a:bodyPr/>
+                    <a:lstStyle/>
+                    <a:p>
+                      <a:r>
+                        <a:rPr sz="2000" b="0">
+                          <a:solidFill>
+                            <a:srgbClr val="1F2A44"/>
+                          </a:solidFill>
+                          <a:latin typeface="Nunito Sans"/>
+                        </a:rPr>
+                        <a:t>¿Gana algo si le creo?</a:t>
+                      </a:r>
+                    </a:p>
+                  </a:txBody>
+                  <a:tcPr>
+                    <a:solidFill>
+                      <a:srgbClr val="FFFFFF"/>
+                    </a:solidFill>
+                  </a:tcPr>
+                </a:tc>
+              </a:tr>
+              <a:tr h="600000">
+                <a:tc>
+                  <a:txBody>
+                    <a:bodyPr/>
+                    <a:lstStyle/>
+                    <a:p>
+                      <a:r>
+                        <a:rPr sz="2000" b="1">
+                          <a:solidFill>
+                            <a:srgbClr val="1F2A44"/>
+                          </a:solidFill>
+                          <a:latin typeface="Nunito Sans"/>
+                        </a:rPr>
+                        <a:t>Sus pruebas</a:t>
+                      </a:r>
+                    </a:p>
+                  </a:txBody>
+                  <a:tcPr>
+                    <a:solidFill>
+                      <a:srgbClr val="EAF0F7"/>
+                    </a:solidFill>
+                  </a:tcPr>
+                </a:tc>
+                <a:tc>
+                  <a:txBody>
+                    <a:bodyPr/>
+                    <a:lstStyle/>
+                    <a:p>
+                      <a:r>
+                        <a:rPr sz="2000" b="0">
+                          <a:solidFill>
+                            <a:srgbClr val="1F2A44"/>
+                          </a:solidFill>
+                          <a:latin typeface="Nunito Sans"/>
+                        </a:rPr>
+                        <a:t>¿Explica cómo lo sabe?</a:t>
+                      </a:r>
+                    </a:p>
+                  </a:txBody>
+                  <a:tcPr>
+                    <a:solidFill>
+                      <a:srgbClr val="EAF0F7"/>
+                    </a:solidFill>
+                  </a:tcPr>
+                </a:tc>
+              </a:tr>
+            </a:tbl>
+          </a:graphicData>
+        </a:graphic>
+      </p:graphicFrame>
     </p:spTree>
   </p:cSld>
   <p:clrMapOvr>
@@ -7753,7 +7031,7 @@
                 </a:solidFill>
                 <a:latin typeface="Nunito Sans"/>
               </a:rPr>
-              <a:t>BLOQUE 1 · TRES HERRAMIENTAS</a:t>
+              <a:t>BLOQUE 1 · REPASO DE LA UNIDAD</a:t>
             </a:r>
           </a:p>
         </p:txBody>
@@ -7792,218 +7070,242 @@
                 </a:solidFill>
                 <a:latin typeface="Fredoka"/>
               </a:rPr>
-              <a:t>Analogía</a:t>
-            </a:r>
-          </a:p>
-        </p:txBody>
-      </p:sp>
-      <p:sp>
-        <p:nvSpPr>
-          <p:cNvPr id="4" name="Rectangle 3"/>
-          <p:cNvSpPr/>
+              <a:t>Dos falacias (sesiones 8 y 9)</a:t>
+            </a:r>
+          </a:p>
+        </p:txBody>
+      </p:sp>
+      <p:graphicFrame>
+        <p:nvGraphicFramePr>
+          <p:cNvPr id="4" name="Table 3"/>
+          <p:cNvGraphicFramePr>
+            <a:graphicFrameLocks noGrp="1"/>
+          </p:cNvGraphicFramePr>
           <p:nvPr/>
-        </p:nvSpPr>
-        <p:spPr>
-          <a:xfrm>
-            <a:off x="640000" y="1650000"/>
-            <a:ext cx="10912000" cy="1150000"/>
-          </a:xfrm>
-          <a:prstGeom prst="rect">
-            <a:avLst/>
-          </a:prstGeom>
-          <a:solidFill>
-            <a:srgbClr val="EAF0F7"/>
-          </a:solidFill>
-          <a:ln>
-            <a:noFill/>
-          </a:ln>
-        </p:spPr>
-        <p:style>
-          <a:lnRef idx="1">
-            <a:schemeClr val="accent1"/>
-          </a:lnRef>
-          <a:fillRef idx="3">
-            <a:schemeClr val="accent1"/>
-          </a:fillRef>
-          <a:effectRef idx="2">
-            <a:schemeClr val="accent1"/>
-          </a:effectRef>
-          <a:fontRef idx="minor">
-            <a:schemeClr val="lt1"/>
-          </a:fontRef>
-        </p:style>
-        <p:txBody>
-          <a:bodyPr rtlCol="0" anchor="ctr"/>
-          <a:lstStyle/>
-          <a:p>
-            <a:pPr algn="ctr"/>
-          </a:p>
-        </p:txBody>
-      </p:sp>
-      <p:sp>
-        <p:nvSpPr>
-          <p:cNvPr id="5" name="TextBox 4"/>
-          <p:cNvSpPr txBox="1"/>
-          <p:nvPr/>
-        </p:nvSpPr>
-        <p:spPr>
-          <a:xfrm>
-            <a:off x="840000" y="1730000"/>
-            <a:ext cx="10512000" cy="1000000"/>
-          </a:xfrm>
-          <a:prstGeom prst="rect">
-            <a:avLst/>
-          </a:prstGeom>
-          <a:noFill/>
-        </p:spPr>
-        <p:txBody>
-          <a:bodyPr wrap="square" anchor="ctr">
-            <a:spAutoFit/>
-          </a:bodyPr>
-          <a:lstStyle/>
-          <a:p>
-            <a:pPr>
-              <a:spcAft>
-                <a:spcPts val="1260"/>
-              </a:spcAft>
-            </a:pPr>
-            <a:r>
-              <a:rPr sz="2800" b="1">
-                <a:solidFill>
-                  <a:srgbClr val="1F2A44"/>
-                </a:solidFill>
-                <a:latin typeface="Nunito Sans"/>
-              </a:rPr>
-              <a:t>Una analogía </a:t>
-            </a:r>
-            <a:r>
-              <a:rPr sz="2800" b="1">
-                <a:solidFill>
-                  <a:srgbClr val="1F2A44"/>
-                </a:solidFill>
-                <a:latin typeface="Nunito Sans"/>
-              </a:rPr>
-              <a:t>compara</a:t>
-            </a:r>
-            <a:r>
-              <a:rPr sz="2800" b="1">
-                <a:solidFill>
-                  <a:srgbClr val="1F2A44"/>
-                </a:solidFill>
-                <a:latin typeface="Nunito Sans"/>
-              </a:rPr>
-              <a:t> dos cosas: si se parecen en lo que importa, lo que vale para una seguramente vale para la otra.</a:t>
-            </a:r>
-          </a:p>
-        </p:txBody>
-      </p:sp>
-      <p:sp>
-        <p:nvSpPr>
-          <p:cNvPr id="6" name="TextBox 5"/>
-          <p:cNvSpPr txBox="1"/>
-          <p:nvPr/>
-        </p:nvSpPr>
-        <p:spPr>
-          <a:xfrm>
-            <a:off x="640000" y="3000000"/>
-            <a:ext cx="10912000" cy="3458000"/>
-          </a:xfrm>
-          <a:prstGeom prst="rect">
-            <a:avLst/>
-          </a:prstGeom>
-          <a:noFill/>
-        </p:spPr>
-        <p:txBody>
-          <a:bodyPr wrap="square">
-            <a:spAutoFit/>
-          </a:bodyPr>
-          <a:lstStyle/>
-          <a:p>
-            <a:pPr>
-              <a:spcAft>
-                <a:spcPts val="1260"/>
-              </a:spcAft>
-            </a:pPr>
-            <a:r>
-              <a:rPr sz="2800" b="1">
-                <a:solidFill>
-                  <a:srgbClr val="E8793A"/>
-                </a:solidFill>
-                <a:latin typeface="Nunito Sans"/>
-              </a:rPr>
-              <a:t>• </a:t>
-            </a:r>
-            <a:r>
-              <a:rPr sz="2800" b="0">
-                <a:solidFill>
-                  <a:srgbClr val="1F2A44"/>
-                </a:solidFill>
-                <a:latin typeface="Nunito Sans"/>
-              </a:rPr>
-              <a:t>«Si el casco protege en la bici, también protegerá en el patinete»</a:t>
-            </a:r>
-          </a:p>
-          <a:p>
-            <a:pPr>
-              <a:spcAft>
-                <a:spcPts val="1260"/>
-              </a:spcAft>
-            </a:pPr>
-            <a:r>
-              <a:rPr sz="2800" b="1">
-                <a:solidFill>
-                  <a:srgbClr val="E8793A"/>
-                </a:solidFill>
-                <a:latin typeface="Nunito Sans"/>
-              </a:rPr>
-              <a:t>• </a:t>
-            </a:r>
-            <a:r>
-              <a:rPr sz="2800" b="0">
-                <a:solidFill>
-                  <a:srgbClr val="1F2A44"/>
-                </a:solidFill>
-                <a:latin typeface="Nunito Sans"/>
-              </a:rPr>
-              <a:t>Es buena si se parecen </a:t>
-            </a:r>
-            <a:r>
-              <a:rPr sz="2800" b="1">
-                <a:solidFill>
-                  <a:srgbClr val="1F2A44"/>
-                </a:solidFill>
-                <a:latin typeface="Nunito Sans"/>
-              </a:rPr>
-              <a:t>en lo que importa</a:t>
-            </a:r>
-          </a:p>
-          <a:p>
-            <a:pPr>
-              <a:spcAft>
-                <a:spcPts val="1260"/>
-              </a:spcAft>
-            </a:pPr>
-            <a:r>
-              <a:rPr sz="2800" b="1">
-                <a:solidFill>
-                  <a:srgbClr val="E8793A"/>
-                </a:solidFill>
-                <a:latin typeface="Nunito Sans"/>
-              </a:rPr>
-              <a:t>• </a:t>
-            </a:r>
-            <a:r>
-              <a:rPr sz="2800" b="0">
-                <a:solidFill>
-                  <a:srgbClr val="1F2A44"/>
-                </a:solidFill>
-                <a:latin typeface="Nunito Sans"/>
-              </a:rPr>
-              <a:t>Como la inducción: da una conclusión probable, no segura</a:t>
-            </a:r>
-          </a:p>
-        </p:txBody>
-      </p:sp>
+        </p:nvGraphicFramePr>
+        <p:xfrm>
+          <a:off x="640000" y="1700000"/>
+          <a:ext cx="10912000" cy="1800000"/>
+        </p:xfrm>
+        <a:graphic>
+          <a:graphicData uri="http://schemas.openxmlformats.org/drawingml/2006/table">
+            <a:tbl>
+              <a:tblPr firstRow="1" bandRow="1">
+                <a:tableStyleId>{5C22544A-7EE6-4342-B048-85BDC9FD1C3A}</a:tableStyleId>
+              </a:tblPr>
+              <a:tblGrid>
+                <a:gridCol w="3637333"/>
+                <a:gridCol w="3637333"/>
+                <a:gridCol w="3637334"/>
+              </a:tblGrid>
+              <a:tr h="600000">
+                <a:tc>
+                  <a:txBody>
+                    <a:bodyPr/>
+                    <a:lstStyle/>
+                    <a:p>
+                      <a:r>
+                        <a:rPr sz="2000" b="1">
+                          <a:solidFill>
+                            <a:srgbClr val="FBF7EF"/>
+                          </a:solidFill>
+                          <a:latin typeface="Fredoka"/>
+                        </a:rPr>
+                        <a:t>Falacia</a:t>
+                      </a:r>
+                    </a:p>
+                  </a:txBody>
+                  <a:tcPr>
+                    <a:solidFill>
+                      <a:srgbClr val="1F2A44"/>
+                    </a:solidFill>
+                  </a:tcPr>
+                </a:tc>
+                <a:tc>
+                  <a:txBody>
+                    <a:bodyPr/>
+                    <a:lstStyle/>
+                    <a:p>
+                      <a:r>
+                        <a:rPr sz="2000" b="1">
+                          <a:solidFill>
+                            <a:srgbClr val="FBF7EF"/>
+                          </a:solidFill>
+                          <a:latin typeface="Fredoka"/>
+                        </a:rPr>
+                        <a:t>Qué dice</a:t>
+                      </a:r>
+                    </a:p>
+                  </a:txBody>
+                  <a:tcPr>
+                    <a:solidFill>
+                      <a:srgbClr val="1F2A44"/>
+                    </a:solidFill>
+                  </a:tcPr>
+                </a:tc>
+                <a:tc>
+                  <a:txBody>
+                    <a:bodyPr/>
+                    <a:lstStyle/>
+                    <a:p>
+                      <a:r>
+                        <a:rPr sz="2000" b="1">
+                          <a:solidFill>
+                            <a:srgbClr val="FBF7EF"/>
+                          </a:solidFill>
+                          <a:latin typeface="Fredoka"/>
+                        </a:rPr>
+                        <a:t>Trucos</a:t>
+                      </a:r>
+                    </a:p>
+                  </a:txBody>
+                  <a:tcPr>
+                    <a:solidFill>
+                      <a:srgbClr val="1F2A44"/>
+                    </a:solidFill>
+                  </a:tcPr>
+                </a:tc>
+              </a:tr>
+              <a:tr h="600000">
+                <a:tc>
+                  <a:txBody>
+                    <a:bodyPr/>
+                    <a:lstStyle/>
+                    <a:p>
+                      <a:r>
+                        <a:rPr sz="2000" b="1">
+                          <a:solidFill>
+                            <a:srgbClr val="1F2A44"/>
+                          </a:solidFill>
+                          <a:latin typeface="Nunito Sans"/>
+                        </a:rPr>
+                        <a:t>De autoridad</a:t>
+                      </a:r>
+                    </a:p>
+                  </a:txBody>
+                  <a:tcPr>
+                    <a:solidFill>
+                      <a:srgbClr val="FFFFFF"/>
+                    </a:solidFill>
+                  </a:tcPr>
+                </a:tc>
+                <a:tc>
+                  <a:txBody>
+                    <a:bodyPr/>
+                    <a:lstStyle/>
+                    <a:p>
+                      <a:r>
+                        <a:rPr sz="2000" b="0">
+                          <a:solidFill>
+                            <a:srgbClr val="1F2A44"/>
+                          </a:solidFill>
+                          <a:latin typeface="Nunito Sans"/>
+                        </a:rPr>
+                        <a:t>«Lo dice alguien importante»</a:t>
+                      </a:r>
+                    </a:p>
+                  </a:txBody>
+                  <a:tcPr>
+                    <a:solidFill>
+                      <a:srgbClr val="FFFFFF"/>
+                    </a:solidFill>
+                  </a:tcPr>
+                </a:tc>
+                <a:tc>
+                  <a:txBody>
+                    <a:bodyPr/>
+                    <a:lstStyle/>
+                    <a:p>
+                      <a:r>
+                        <a:rPr sz="2000" b="0">
+                          <a:solidFill>
+                            <a:srgbClr val="1F2A44"/>
+                          </a:solidFill>
+                          <a:latin typeface="Nunito Sans"/>
+                        </a:rPr>
+                        <a:t>El famoso, la bata blanca, «los expertos dicen»</a:t>
+                      </a:r>
+                    </a:p>
+                  </a:txBody>
+                  <a:tcPr>
+                    <a:solidFill>
+                      <a:srgbClr val="FFFFFF"/>
+                    </a:solidFill>
+                  </a:tcPr>
+                </a:tc>
+              </a:tr>
+              <a:tr h="600000">
+                <a:tc>
+                  <a:txBody>
+                    <a:bodyPr/>
+                    <a:lstStyle/>
+                    <a:p>
+                      <a:r>
+                        <a:rPr sz="2000" b="1">
+                          <a:solidFill>
+                            <a:srgbClr val="1F2A44"/>
+                          </a:solidFill>
+                          <a:latin typeface="Nunito Sans"/>
+                        </a:rPr>
+                        <a:t>De la mayoría</a:t>
+                      </a:r>
+                    </a:p>
+                  </a:txBody>
+                  <a:tcPr>
+                    <a:solidFill>
+                      <a:srgbClr val="EAF0F7"/>
+                    </a:solidFill>
+                  </a:tcPr>
+                </a:tc>
+                <a:tc>
+                  <a:txBody>
+                    <a:bodyPr/>
+                    <a:lstStyle/>
+                    <a:p>
+                      <a:r>
+                        <a:rPr sz="2000" b="0">
+                          <a:solidFill>
+                            <a:srgbClr val="1F2A44"/>
+                          </a:solidFill>
+                          <a:latin typeface="Nunito Sans"/>
+                        </a:rPr>
+                        <a:t>«Lo hace todo el mundo»</a:t>
+                      </a:r>
+                    </a:p>
+                  </a:txBody>
+                  <a:tcPr>
+                    <a:solidFill>
+                      <a:srgbClr val="EAF0F7"/>
+                    </a:solidFill>
+                  </a:tcPr>
+                </a:tc>
+                <a:tc>
+                  <a:txBody>
+                    <a:bodyPr/>
+                    <a:lstStyle/>
+                    <a:p>
+                      <a:r>
+                        <a:rPr sz="2000" b="0">
+                          <a:solidFill>
+                            <a:srgbClr val="1F2A44"/>
+                          </a:solidFill>
+                          <a:latin typeface="Nunito Sans"/>
+                        </a:rPr>
+                        <a:t>Los «me gusta», las colas, las modas</a:t>
+                      </a:r>
+                    </a:p>
+                  </a:txBody>
+                  <a:tcPr>
+                    <a:solidFill>
+                      <a:srgbClr val="EAF0F7"/>
+                    </a:solidFill>
+                  </a:tcPr>
+                </a:tc>
+              </a:tr>
+            </a:tbl>
+          </a:graphicData>
+        </a:graphic>
+      </p:graphicFrame>
     </p:spTree>
   </p:cSld>
   <p:clrMapOvr>
@@ -8018,7 +7320,7 @@
     <p:bg>
       <p:bgPr>
         <a:solidFill>
-          <a:srgbClr val="1F2A44"/>
+          <a:srgbClr val="FBF7EF"/>
         </a:solidFill>
         <a:effectLst/>
       </p:bgPr>
@@ -8038,8 +7340,8 @@
         </p:nvSpPr>
         <p:spPr>
           <a:xfrm>
-            <a:off x="640000" y="2300000"/>
-            <a:ext cx="10912000" cy="500000"/>
+            <a:off x="640000" y="380000"/>
+            <a:ext cx="10912000" cy="420000"/>
           </a:xfrm>
           <a:prstGeom prst="rect">
             <a:avLst/>
@@ -8054,17 +7356,17 @@
           <a:p>
             <a:pPr>
               <a:spcAft>
-                <a:spcPts val="810"/>
+                <a:spcPts val="630"/>
               </a:spcAft>
             </a:pPr>
             <a:r>
-              <a:rPr sz="1800" b="1">
-                <a:solidFill>
-                  <a:srgbClr val="F4B183"/>
+              <a:rPr sz="1400" b="1">
+                <a:solidFill>
+                  <a:srgbClr val="E8793A"/>
                 </a:solidFill>
                 <a:latin typeface="Nunito Sans"/>
               </a:rPr>
-              <a:t>BLOQUE 2</a:t>
+              <a:t>BLOQUE 1 · REPASO DE LA UNIDAD</a:t>
             </a:r>
           </a:p>
         </p:txBody>
@@ -8077,7 +7379,7 @@
         </p:nvSpPr>
         <p:spPr>
           <a:xfrm>
-            <a:off x="640000" y="2800000"/>
+            <a:off x="640000" y="760000"/>
             <a:ext cx="10912000" cy="800000"/>
           </a:xfrm>
           <a:prstGeom prst="rect">
@@ -8093,21 +7395,320 @@
           <a:p>
             <a:pPr>
               <a:spcAft>
-                <a:spcPts val="2160"/>
+                <a:spcPts val="1710"/>
               </a:spcAft>
             </a:pPr>
             <a:r>
-              <a:rPr sz="4800" b="1">
-                <a:solidFill>
-                  <a:srgbClr val="FBF7EF"/>
+              <a:rPr sz="3800" b="1">
+                <a:solidFill>
+                  <a:srgbClr val="1F2A44"/>
                 </a:solidFill>
                 <a:latin typeface="Fredoka"/>
               </a:rPr>
-              <a:t>Casos resueltos</a:t>
-            </a:r>
-          </a:p>
-        </p:txBody>
-      </p:sp>
+              <a:t>Asch y Milgram (sesión 10)</a:t>
+            </a:r>
+          </a:p>
+        </p:txBody>
+      </p:sp>
+      <p:graphicFrame>
+        <p:nvGraphicFramePr>
+          <p:cNvPr id="4" name="Table 3"/>
+          <p:cNvGraphicFramePr>
+            <a:graphicFrameLocks noGrp="1"/>
+          </p:cNvGraphicFramePr>
+          <p:nvPr/>
+        </p:nvGraphicFramePr>
+        <p:xfrm>
+          <a:off x="640000" y="1700000"/>
+          <a:ext cx="10912000" cy="2400000"/>
+        </p:xfrm>
+        <a:graphic>
+          <a:graphicData uri="http://schemas.openxmlformats.org/drawingml/2006/table">
+            <a:tbl>
+              <a:tblPr firstRow="1" bandRow="1">
+                <a:tableStyleId>{5C22544A-7EE6-4342-B048-85BDC9FD1C3A}</a:tableStyleId>
+              </a:tblPr>
+              <a:tblGrid>
+                <a:gridCol w="3637333"/>
+                <a:gridCol w="3637333"/>
+                <a:gridCol w="3637334"/>
+              </a:tblGrid>
+              <a:tr h="600000">
+                <a:tc>
+                  <a:txBody>
+                    <a:bodyPr/>
+                    <a:lstStyle/>
+                    <a:p>
+                      <a:r>
+                        <a:rPr sz="2000" b="1">
+                          <a:solidFill>
+                            <a:srgbClr val="FBF7EF"/>
+                          </a:solidFill>
+                          <a:latin typeface="Fredoka"/>
+                        </a:rPr>
+                        <a:t/>
+                      </a:r>
+                    </a:p>
+                  </a:txBody>
+                  <a:tcPr>
+                    <a:solidFill>
+                      <a:srgbClr val="1F2A44"/>
+                    </a:solidFill>
+                  </a:tcPr>
+                </a:tc>
+                <a:tc>
+                  <a:txBody>
+                    <a:bodyPr/>
+                    <a:lstStyle/>
+                    <a:p>
+                      <a:r>
+                        <a:rPr sz="2000" b="1">
+                          <a:solidFill>
+                            <a:srgbClr val="FBF7EF"/>
+                          </a:solidFill>
+                          <a:latin typeface="Fredoka"/>
+                        </a:rPr>
+                        <a:t>Asch</a:t>
+                      </a:r>
+                    </a:p>
+                  </a:txBody>
+                  <a:tcPr>
+                    <a:solidFill>
+                      <a:srgbClr val="1F2A44"/>
+                    </a:solidFill>
+                  </a:tcPr>
+                </a:tc>
+                <a:tc>
+                  <a:txBody>
+                    <a:bodyPr/>
+                    <a:lstStyle/>
+                    <a:p>
+                      <a:r>
+                        <a:rPr sz="2000" b="1">
+                          <a:solidFill>
+                            <a:srgbClr val="FBF7EF"/>
+                          </a:solidFill>
+                          <a:latin typeface="Fredoka"/>
+                        </a:rPr>
+                        <a:t>Milgram</a:t>
+                      </a:r>
+                    </a:p>
+                  </a:txBody>
+                  <a:tcPr>
+                    <a:solidFill>
+                      <a:srgbClr val="1F2A44"/>
+                    </a:solidFill>
+                  </a:tcPr>
+                </a:tc>
+              </a:tr>
+              <a:tr h="600000">
+                <a:tc>
+                  <a:txBody>
+                    <a:bodyPr/>
+                    <a:lstStyle/>
+                    <a:p>
+                      <a:r>
+                        <a:rPr sz="2000" b="1">
+                          <a:solidFill>
+                            <a:srgbClr val="1F2A44"/>
+                          </a:solidFill>
+                          <a:latin typeface="Nunito Sans"/>
+                        </a:rPr>
+                        <a:t>Qué estudia</a:t>
+                      </a:r>
+                    </a:p>
+                  </a:txBody>
+                  <a:tcPr>
+                    <a:solidFill>
+                      <a:srgbClr val="FFFFFF"/>
+                    </a:solidFill>
+                  </a:tcPr>
+                </a:tc>
+                <a:tc>
+                  <a:txBody>
+                    <a:bodyPr/>
+                    <a:lstStyle/>
+                    <a:p>
+                      <a:r>
+                        <a:rPr sz="2000" b="0">
+                          <a:solidFill>
+                            <a:srgbClr val="1F2A44"/>
+                          </a:solidFill>
+                          <a:latin typeface="Nunito Sans"/>
+                        </a:rPr>
+                        <a:t>Conformidad: seguir al grupo</a:t>
+                      </a:r>
+                    </a:p>
+                  </a:txBody>
+                  <a:tcPr>
+                    <a:solidFill>
+                      <a:srgbClr val="FFFFFF"/>
+                    </a:solidFill>
+                  </a:tcPr>
+                </a:tc>
+                <a:tc>
+                  <a:txBody>
+                    <a:bodyPr/>
+                    <a:lstStyle/>
+                    <a:p>
+                      <a:r>
+                        <a:rPr sz="2000" b="0">
+                          <a:solidFill>
+                            <a:srgbClr val="1F2A44"/>
+                          </a:solidFill>
+                          <a:latin typeface="Nunito Sans"/>
+                        </a:rPr>
+                        <a:t>Obediencia: seguir a una autoridad</a:t>
+                      </a:r>
+                    </a:p>
+                  </a:txBody>
+                  <a:tcPr>
+                    <a:solidFill>
+                      <a:srgbClr val="FFFFFF"/>
+                    </a:solidFill>
+                  </a:tcPr>
+                </a:tc>
+              </a:tr>
+              <a:tr h="600000">
+                <a:tc>
+                  <a:txBody>
+                    <a:bodyPr/>
+                    <a:lstStyle/>
+                    <a:p>
+                      <a:r>
+                        <a:rPr sz="2000" b="1">
+                          <a:solidFill>
+                            <a:srgbClr val="1F2A44"/>
+                          </a:solidFill>
+                          <a:latin typeface="Nunito Sans"/>
+                        </a:rPr>
+                        <a:t>Qué pasó</a:t>
+                      </a:r>
+                    </a:p>
+                  </a:txBody>
+                  <a:tcPr>
+                    <a:solidFill>
+                      <a:srgbClr val="EAF0F7"/>
+                    </a:solidFill>
+                  </a:tcPr>
+                </a:tc>
+                <a:tc>
+                  <a:txBody>
+                    <a:bodyPr/>
+                    <a:lstStyle/>
+                    <a:p>
+                      <a:r>
+                        <a:rPr sz="2000" b="0">
+                          <a:solidFill>
+                            <a:srgbClr val="1F2A44"/>
+                          </a:solidFill>
+                          <a:latin typeface="Nunito Sans"/>
+                        </a:rPr>
+                        <a:t>3 de cada 4 cedieron alguna vez; 1 de cada 4, nunca</a:t>
+                      </a:r>
+                    </a:p>
+                  </a:txBody>
+                  <a:tcPr>
+                    <a:solidFill>
+                      <a:srgbClr val="EAF0F7"/>
+                    </a:solidFill>
+                  </a:tcPr>
+                </a:tc>
+                <a:tc>
+                  <a:txBody>
+                    <a:bodyPr/>
+                    <a:lstStyle/>
+                    <a:p>
+                      <a:r>
+                        <a:rPr sz="2000" b="0">
+                          <a:solidFill>
+                            <a:srgbClr val="1F2A44"/>
+                          </a:solidFill>
+                          <a:latin typeface="Nunito Sans"/>
+                        </a:rPr>
+                        <a:t>El 65 % llegó al final en la versión más conocida</a:t>
+                      </a:r>
+                    </a:p>
+                  </a:txBody>
+                  <a:tcPr>
+                    <a:solidFill>
+                      <a:srgbClr val="EAF0F7"/>
+                    </a:solidFill>
+                  </a:tcPr>
+                </a:tc>
+              </a:tr>
+              <a:tr h="600000">
+                <a:tc>
+                  <a:txBody>
+                    <a:bodyPr/>
+                    <a:lstStyle/>
+                    <a:p>
+                      <a:r>
+                        <a:rPr sz="2000" b="1">
+                          <a:solidFill>
+                            <a:srgbClr val="1F2A44"/>
+                          </a:solidFill>
+                          <a:latin typeface="Nunito Sans"/>
+                        </a:rPr>
+                        <a:t>Qué ayudó a resistir</a:t>
+                      </a:r>
+                    </a:p>
+                  </a:txBody>
+                  <a:tcPr>
+                    <a:solidFill>
+                      <a:srgbClr val="FFFFFF"/>
+                    </a:solidFill>
+                  </a:tcPr>
+                </a:tc>
+                <a:tc>
+                  <a:txBody>
+                    <a:bodyPr/>
+                    <a:lstStyle/>
+                    <a:p>
+                      <a:r>
+                        <a:rPr sz="2000" b="0">
+                          <a:solidFill>
+                            <a:srgbClr val="1F2A44"/>
+                          </a:solidFill>
+                          <a:latin typeface="Nunito Sans"/>
+                        </a:rPr>
+                        <a:t>Tener un aliado</a:t>
+                      </a:r>
+                    </a:p>
+                  </a:txBody>
+                  <a:tcPr>
+                    <a:solidFill>
+                      <a:srgbClr val="FFFFFF"/>
+                    </a:solidFill>
+                  </a:tcPr>
+                </a:tc>
+                <a:tc>
+                  <a:txBody>
+                    <a:bodyPr/>
+                    <a:lstStyle/>
+                    <a:p>
+                      <a:r>
+                        <a:rPr sz="2000" b="0">
+                          <a:solidFill>
+                            <a:srgbClr val="1F2A44"/>
+                          </a:solidFill>
+                          <a:latin typeface="Nunito Sans"/>
+                        </a:rPr>
+                        <a:t>Ver a otros negarse</a:t>
+                      </a:r>
+                    </a:p>
+                  </a:txBody>
+                  <a:tcPr>
+                    <a:solidFill>
+                      <a:srgbClr val="FFFFFF"/>
+                    </a:solidFill>
+                  </a:tcPr>
+                </a:tc>
+              </a:tr>
+            </a:tbl>
+          </a:graphicData>
+        </a:graphic>
+      </p:graphicFrame>
     </p:spTree>
   </p:cSld>
   <p:clrMapOvr>
